--- a/dist/초6/수학/입체와측정/초6_수학_입체와측정_04_직육면체의겉넓이.pptx
+++ b/dist/초6/수학/입체와측정/초6_수학_입체와측정_04_직육면체의겉넓이.pptx
@@ -120,13 +120,13 @@
   <p:extLst>
     <p:ext uri="{521415D9-36F7-43E2-AB2F-B90AF26B5E84}">
       <p14:sectionLst xmlns:p14="http://schemas.microsoft.com/office/powerpoint/2010/main">
-        <p14:section name="도입" id="{ff2740f7-daab-ceac-0702-54446cfd449f}">
+        <p14:section name="도입" id="{494955e8-ab2b-0dc3-6f3a-a565df2ffdae}">
           <p14:sldIdLst>
             <p14:sldId id="256"/>
             <p14:sldId id="257"/>
           </p14:sldIdLst>
         </p14:section>
-        <p14:section name="개념" id="{51cf1616-b1a9-1a73-f991-caf2830c2ffe}">
+        <p14:section name="개념" id="{cec6e53f-109d-fba9-5704-9c7d55803d23}">
           <p14:sldIdLst>
             <p14:sldId id="258"/>
             <p14:sldId id="259"/>
@@ -134,32 +134,32 @@
             <p14:sldId id="263"/>
           </p14:sldIdLst>
         </p14:section>
-        <p14:section name="연습" id="{d3962990-2062-313a-77f0-4c35e246a192}">
+        <p14:section name="연습" id="{c90908e4-7c43-1ac6-ea28-6d95461f6730}">
           <p14:sldIdLst>
             <p14:sldId id="261"/>
             <p14:sldId id="262"/>
             <p14:sldId id="264"/>
           </p14:sldIdLst>
         </p14:section>
-        <p14:section name="개념" id="{f69b4dcb-4dac-567f-dd49-f2d0f924a79f}">
+        <p14:section name="개념" id="{f9ab2346-9710-75a1-0cbd-1386525d9ba4}">
           <p14:sldIdLst/>
         </p14:section>
-        <p14:section name="연습" id="{077fe257-302f-0271-0a6b-09eacfb7f27f}">
+        <p14:section name="연습" id="{97038fc3-33e5-4851-08db-f4d10a05d2d6}">
           <p14:sldIdLst/>
         </p14:section>
-        <p14:section name="확인" id="{32b018a7-b334-9049-71af-c44bdb0cc450}">
+        <p14:section name="확인" id="{7d53c0dd-290c-9827-96ef-41aa47cbe51f}">
           <p14:sldIdLst>
             <p14:sldId id="265"/>
             <p14:sldId id="266"/>
             <p14:sldId id="267"/>
           </p14:sldIdLst>
         </p14:section>
-        <p14:section name="정리" id="{62aec8b1-68b1-dddd-453f-f96a46c7a939}">
+        <p14:section name="정리" id="{3ec8a091-c5fb-debf-20ba-56a86c8758ef}">
           <p14:sldIdLst>
             <p14:sldId id="268"/>
           </p14:sldIdLst>
         </p14:section>
-        <p14:section name="보충" id="{4a583811-4acd-9b28-9bfa-ed39a763deb8}">
+        <p14:section name="보충" id="{83d4df49-4dce-758a-3c37-28d5358891d9}">
           <p14:sldIdLst>
             <p14:sldId id="269"/>
           </p14:sldIdLst>
@@ -3074,8 +3074,8 @@
         </p:nvSpPr>
         <p:spPr>
           <a:xfrm>
-            <a:off x="8181645" y="1796694"/>
-            <a:ext cx="2228555" cy="1114278"/>
+            <a:off x="8181645" y="1678726"/>
+            <a:ext cx="1786921" cy="893460"/>
           </a:xfrm>
           <a:custGeom>
             <a:avLst/>
@@ -3084,15 +3084,15 @@
             <a:cxnLst/>
             <a:rect l="l" t="t" r="r" b="b"/>
             <a:pathLst>
-              <a:path w="2228555" h="1114278">
+              <a:path w="1786921" h="893460">
                 <a:moveTo>
-                  <a:pt x="0" y="1114278"/>
+                  <a:pt x="0" y="893460"/>
                 </a:moveTo>
                 <a:lnTo>
-                  <a:pt x="2228555" y="1114278"/>
-                </a:lnTo>
-                <a:lnTo>
-                  <a:pt x="2228555" y="0"/>
+                  <a:pt x="1786921" y="893460"/>
+                </a:lnTo>
+                <a:lnTo>
+                  <a:pt x="1786921" y="0"/>
                 </a:lnTo>
                 <a:lnTo>
                   <a:pt x="0" y="0"/>
@@ -3120,8 +3120,8 @@
         </p:nvSpPr>
         <p:spPr>
           <a:xfrm>
-            <a:off x="8181645" y="1295269"/>
-            <a:ext cx="2930550" cy="501425"/>
+            <a:off x="8181645" y="1276669"/>
+            <a:ext cx="2349801" cy="402057"/>
           </a:xfrm>
           <a:custGeom>
             <a:avLst/>
@@ -3130,18 +3130,18 @@
             <a:cxnLst/>
             <a:rect l="l" t="t" r="r" b="b"/>
             <a:pathLst>
-              <a:path w="2930550" h="501425">
+              <a:path w="2349801" h="402057">
                 <a:moveTo>
-                  <a:pt x="0" y="501425"/>
+                  <a:pt x="0" y="402057"/>
                 </a:moveTo>
                 <a:lnTo>
-                  <a:pt x="2228555" y="501425"/>
-                </a:lnTo>
-                <a:lnTo>
-                  <a:pt x="2930550" y="0"/>
-                </a:lnTo>
-                <a:lnTo>
-                  <a:pt x="701995" y="0"/>
+                  <a:pt x="1786921" y="402057"/>
+                </a:lnTo>
+                <a:lnTo>
+                  <a:pt x="2349801" y="0"/>
+                </a:lnTo>
+                <a:lnTo>
+                  <a:pt x="562880" y="0"/>
                 </a:lnTo>
                 <a:close/>
               </a:path>
@@ -3166,8 +3166,8 @@
         </p:nvSpPr>
         <p:spPr>
           <a:xfrm>
-            <a:off x="10410200" y="1295269"/>
-            <a:ext cx="701995" cy="1615703"/>
+            <a:off x="9968566" y="1276669"/>
+            <a:ext cx="562880" cy="1295518"/>
           </a:xfrm>
           <a:custGeom>
             <a:avLst/>
@@ -3176,18 +3176,18 @@
             <a:cxnLst/>
             <a:rect l="l" t="t" r="r" b="b"/>
             <a:pathLst>
-              <a:path w="701995" h="1615703">
+              <a:path w="562880" h="1295518">
                 <a:moveTo>
-                  <a:pt x="0" y="1615703"/>
+                  <a:pt x="0" y="1295518"/>
                 </a:moveTo>
                 <a:lnTo>
-                  <a:pt x="701995" y="1114278"/>
-                </a:lnTo>
-                <a:lnTo>
-                  <a:pt x="701995" y="0"/>
-                </a:lnTo>
-                <a:lnTo>
-                  <a:pt x="0" y="501425"/>
+                  <a:pt x="562880" y="893460"/>
+                </a:lnTo>
+                <a:lnTo>
+                  <a:pt x="562880" y="0"/>
+                </a:lnTo>
+                <a:lnTo>
+                  <a:pt x="0" y="402057"/>
                 </a:lnTo>
                 <a:close/>
               </a:path>
@@ -3212,8 +3212,8 @@
         </p:nvSpPr>
         <p:spPr>
           <a:xfrm>
-            <a:off x="8883640" y="2409546"/>
-            <a:ext cx="2228555" cy="0"/>
+            <a:off x="8744525" y="2170130"/>
+            <a:ext cx="1786921" cy="0"/>
           </a:xfrm>
           <a:prstGeom prst="line">
             <a:avLst/>
@@ -3235,8 +3235,8 @@
         </p:nvSpPr>
         <p:spPr>
           <a:xfrm flipV="1">
-            <a:off x="8883640" y="1295269"/>
-            <a:ext cx="0" cy="1114278"/>
+            <a:off x="8744525" y="1276669"/>
+            <a:ext cx="0" cy="893460"/>
           </a:xfrm>
           <a:prstGeom prst="line">
             <a:avLst/>
@@ -3258,8 +3258,8 @@
         </p:nvSpPr>
         <p:spPr>
           <a:xfrm flipH="1">
-            <a:off x="8181645" y="2409546"/>
-            <a:ext cx="701995" cy="501425"/>
+            <a:off x="8181645" y="2170130"/>
+            <a:ext cx="562880" cy="402057"/>
           </a:xfrm>
           <a:prstGeom prst="line">
             <a:avLst/>
@@ -3281,8 +3281,8 @@
         </p:nvSpPr>
         <p:spPr>
           <a:xfrm>
-            <a:off x="8181645" y="2910971"/>
-            <a:ext cx="2228555" cy="0"/>
+            <a:off x="8181645" y="2572187"/>
+            <a:ext cx="1786921" cy="0"/>
           </a:xfrm>
           <a:prstGeom prst="line">
             <a:avLst/>
@@ -3304,8 +3304,8 @@
         </p:nvSpPr>
         <p:spPr>
           <a:xfrm flipV="1">
-            <a:off x="10410200" y="2409546"/>
-            <a:ext cx="701995" cy="501425"/>
+            <a:off x="9968566" y="2170130"/>
+            <a:ext cx="562880" cy="402057"/>
           </a:xfrm>
           <a:prstGeom prst="line">
             <a:avLst/>
@@ -3327,8 +3327,8 @@
         </p:nvSpPr>
         <p:spPr>
           <a:xfrm flipV="1">
-            <a:off x="11112195" y="1295269"/>
-            <a:ext cx="0" cy="1114278"/>
+            <a:off x="10531446" y="1276669"/>
+            <a:ext cx="0" cy="893460"/>
           </a:xfrm>
           <a:prstGeom prst="line">
             <a:avLst/>
@@ -3350,7 +3350,7 @@
         </p:nvSpPr>
         <p:spPr>
           <a:xfrm>
-            <a:off x="8914161" y="2987806"/>
+            <a:off x="8693343" y="2649022"/>
             <a:ext cx="763524" cy="349250"/>
           </a:xfrm>
           <a:prstGeom prst="rect">
@@ -3389,7 +3389,7 @@
         </p:nvSpPr>
         <p:spPr>
           <a:xfrm>
-            <a:off x="10609388" y="2807566"/>
+            <a:off x="10098196" y="2518466"/>
             <a:ext cx="763524" cy="349250"/>
           </a:xfrm>
           <a:prstGeom prst="rect">
@@ -3428,7 +3428,7 @@
         </p:nvSpPr>
         <p:spPr>
           <a:xfrm>
-            <a:off x="11116005" y="1677783"/>
+            <a:off x="10535256" y="1548774"/>
             <a:ext cx="763524" cy="349250"/>
           </a:xfrm>
           <a:prstGeom prst="rect">
@@ -3636,7 +3636,7 @@
       </p:sp>
       <p:sp>
         <p:nvSpPr>
-          <p:cNvPr id="3" name="S10-text272"/>
+          <p:cNvPr id="3" name="S10-text270"/>
           <p:cNvSpPr txBox="1"/>
           <p:nvPr/>
         </p:nvSpPr>
@@ -3675,7 +3675,7 @@
       </p:sp>
       <p:sp>
         <p:nvSpPr>
-          <p:cNvPr id="4" name="S10-mark273"/>
+          <p:cNvPr id="4" name="S10-mark271"/>
           <p:cNvSpPr/>
           <p:nvPr/>
         </p:nvSpPr>
@@ -3709,14 +3709,14 @@
             </a:pathLst>
           </a:custGeom>
           <a:solidFill>
-            <a:srgbClr val="F2C14E"/>
+            <a:srgbClr val="FDEBDD"/>
           </a:solidFill>
           <a:ln/>
         </p:spPr>
       </p:sp>
       <p:sp>
         <p:nvSpPr>
-          <p:cNvPr id="5" name="S10-mark274"/>
+          <p:cNvPr id="5" name="S10-mark272"/>
           <p:cNvSpPr/>
           <p:nvPr/>
         </p:nvSpPr>
@@ -3750,14 +3750,14 @@
             </a:pathLst>
           </a:custGeom>
           <a:solidFill>
-            <a:srgbClr val="CDEBE6"/>
+            <a:srgbClr val="FDEBDD"/>
           </a:solidFill>
           <a:ln/>
         </p:spPr>
       </p:sp>
       <p:sp>
         <p:nvSpPr>
-          <p:cNvPr id="6" name="S10-mark275"/>
+          <p:cNvPr id="6" name="S10-mark273"/>
           <p:cNvSpPr/>
           <p:nvPr/>
         </p:nvSpPr>
@@ -3791,14 +3791,14 @@
             </a:pathLst>
           </a:custGeom>
           <a:solidFill>
-            <a:srgbClr val="F2C14E"/>
+            <a:srgbClr val="FDEBDD"/>
           </a:solidFill>
           <a:ln/>
         </p:spPr>
       </p:sp>
       <p:sp>
         <p:nvSpPr>
-          <p:cNvPr id="7" name="S10-mark276"/>
+          <p:cNvPr id="7" name="S10-mark274"/>
           <p:cNvSpPr/>
           <p:nvPr/>
         </p:nvSpPr>
@@ -3832,14 +3832,14 @@
             </a:pathLst>
           </a:custGeom>
           <a:solidFill>
-            <a:srgbClr val="CDEBE6"/>
+            <a:srgbClr val="FDEBDD"/>
           </a:solidFill>
           <a:ln/>
         </p:spPr>
       </p:sp>
       <p:sp>
         <p:nvSpPr>
-          <p:cNvPr id="8" name="S10-mark277"/>
+          <p:cNvPr id="8" name="S10-mark275"/>
           <p:cNvSpPr/>
           <p:nvPr/>
         </p:nvSpPr>
@@ -3880,7 +3880,7 @@
       </p:sp>
       <p:sp>
         <p:nvSpPr>
-          <p:cNvPr id="9" name="S10-mark278"/>
+          <p:cNvPr id="9" name="S10-mark276"/>
           <p:cNvSpPr/>
           <p:nvPr/>
         </p:nvSpPr>
@@ -3921,7 +3921,7 @@
       </p:sp>
       <p:sp>
         <p:nvSpPr>
-          <p:cNvPr id="10" name="S10-mark279"/>
+          <p:cNvPr id="10" name="S10-mark277"/>
           <p:cNvSpPr/>
           <p:nvPr/>
         </p:nvSpPr>
@@ -3944,7 +3944,7 @@
       </p:sp>
       <p:sp>
         <p:nvSpPr>
-          <p:cNvPr id="11" name="S10-mark280"/>
+          <p:cNvPr id="11" name="S10-mark278"/>
           <p:cNvSpPr/>
           <p:nvPr/>
         </p:nvSpPr>
@@ -3967,7 +3967,7 @@
       </p:sp>
       <p:sp>
         <p:nvSpPr>
-          <p:cNvPr id="12" name="S10-mark281"/>
+          <p:cNvPr id="12" name="S10-mark279"/>
           <p:cNvSpPr/>
           <p:nvPr/>
         </p:nvSpPr>
@@ -3990,7 +3990,7 @@
       </p:sp>
       <p:sp>
         <p:nvSpPr>
-          <p:cNvPr id="13" name="S10-mark282"/>
+          <p:cNvPr id="13" name="S10-mark280"/>
           <p:cNvSpPr/>
           <p:nvPr/>
         </p:nvSpPr>
@@ -4013,7 +4013,7 @@
       </p:sp>
       <p:sp>
         <p:nvSpPr>
-          <p:cNvPr id="14" name="S10-mark283"/>
+          <p:cNvPr id="14" name="S10-mark281"/>
           <p:cNvSpPr/>
           <p:nvPr/>
         </p:nvSpPr>
@@ -4036,7 +4036,7 @@
       </p:sp>
       <p:sp>
         <p:nvSpPr>
-          <p:cNvPr id="15" name="S10-mark284"/>
+          <p:cNvPr id="15" name="S10-mark282"/>
           <p:cNvSpPr/>
           <p:nvPr/>
         </p:nvSpPr>
@@ -4059,7 +4059,7 @@
       </p:sp>
       <p:sp>
         <p:nvSpPr>
-          <p:cNvPr id="16" name="S10-mark285"/>
+          <p:cNvPr id="16" name="S10-mark283"/>
           <p:cNvSpPr/>
           <p:nvPr/>
         </p:nvSpPr>
@@ -4082,7 +4082,7 @@
       </p:sp>
       <p:sp>
         <p:nvSpPr>
-          <p:cNvPr id="17" name="S10-mark286"/>
+          <p:cNvPr id="17" name="S10-mark284"/>
           <p:cNvSpPr/>
           <p:nvPr/>
         </p:nvSpPr>
@@ -4105,7 +4105,7 @@
       </p:sp>
       <p:sp>
         <p:nvSpPr>
-          <p:cNvPr id="18" name="S10-mark287"/>
+          <p:cNvPr id="18" name="S10-mark285"/>
           <p:cNvSpPr/>
           <p:nvPr/>
         </p:nvSpPr>
@@ -4128,7 +4128,7 @@
       </p:sp>
       <p:sp>
         <p:nvSpPr>
-          <p:cNvPr id="19" name="S10-mark288"/>
+          <p:cNvPr id="19" name="S10-mark286"/>
           <p:cNvSpPr/>
           <p:nvPr/>
         </p:nvSpPr>
@@ -4151,7 +4151,7 @@
       </p:sp>
       <p:sp>
         <p:nvSpPr>
-          <p:cNvPr id="20" name="S10-mark289"/>
+          <p:cNvPr id="20" name="S10-mark287"/>
           <p:cNvSpPr/>
           <p:nvPr/>
         </p:nvSpPr>
@@ -4174,7 +4174,7 @@
       </p:sp>
       <p:sp>
         <p:nvSpPr>
-          <p:cNvPr id="21" name="S10-mark290"/>
+          <p:cNvPr id="21" name="S10-mark288"/>
           <p:cNvSpPr/>
           <p:nvPr/>
         </p:nvSpPr>
@@ -4197,7 +4197,7 @@
       </p:sp>
       <p:sp>
         <p:nvSpPr>
-          <p:cNvPr id="22" name="S10-mark291"/>
+          <p:cNvPr id="22" name="S10-mark289"/>
           <p:cNvSpPr/>
           <p:nvPr/>
         </p:nvSpPr>
@@ -4220,7 +4220,7 @@
       </p:sp>
       <p:sp>
         <p:nvSpPr>
-          <p:cNvPr id="23" name="S10-mark292"/>
+          <p:cNvPr id="23" name="S10-mark290"/>
           <p:cNvSpPr/>
           <p:nvPr/>
         </p:nvSpPr>
@@ -4243,7 +4243,7 @@
       </p:sp>
       <p:sp>
         <p:nvSpPr>
-          <p:cNvPr id="24" name="S10-mark293"/>
+          <p:cNvPr id="24" name="S10-mark291"/>
           <p:cNvSpPr/>
           <p:nvPr/>
         </p:nvSpPr>
@@ -4266,7 +4266,7 @@
       </p:sp>
       <p:sp>
         <p:nvSpPr>
-          <p:cNvPr id="25" name="S10-mark294"/>
+          <p:cNvPr id="25" name="S10-mark292"/>
           <p:cNvSpPr/>
           <p:nvPr/>
         </p:nvSpPr>
@@ -4289,7 +4289,7 @@
       </p:sp>
       <p:sp>
         <p:nvSpPr>
-          <p:cNvPr id="26" name="S10-mark295"/>
+          <p:cNvPr id="26" name="S10-mark293"/>
           <p:cNvSpPr/>
           <p:nvPr/>
         </p:nvSpPr>
@@ -4312,7 +4312,7 @@
       </p:sp>
       <p:sp>
         <p:nvSpPr>
-          <p:cNvPr id="27" name="S10-mark296"/>
+          <p:cNvPr id="27" name="S10-mark294"/>
           <p:cNvSpPr/>
           <p:nvPr/>
         </p:nvSpPr>
@@ -4335,7 +4335,7 @@
       </p:sp>
       <p:sp>
         <p:nvSpPr>
-          <p:cNvPr id="28" name="S10-mark297"/>
+          <p:cNvPr id="28" name="S10-mark295"/>
           <p:cNvSpPr/>
           <p:nvPr/>
         </p:nvSpPr>
@@ -4358,7 +4358,7 @@
       </p:sp>
       <p:sp>
         <p:nvSpPr>
-          <p:cNvPr id="29" name="S10-mark298"/>
+          <p:cNvPr id="29" name="S10-mark296"/>
           <p:cNvSpPr/>
           <p:nvPr/>
         </p:nvSpPr>
@@ -4381,7 +4381,7 @@
       </p:sp>
       <p:sp>
         <p:nvSpPr>
-          <p:cNvPr id="30" name="S10-mark299"/>
+          <p:cNvPr id="30" name="S10-mark297"/>
           <p:cNvSpPr/>
           <p:nvPr/>
         </p:nvSpPr>
@@ -4404,7 +4404,7 @@
       </p:sp>
       <p:sp>
         <p:nvSpPr>
-          <p:cNvPr id="31" name="S10-mark300"/>
+          <p:cNvPr id="31" name="S10-mark298"/>
           <p:cNvSpPr/>
           <p:nvPr/>
         </p:nvSpPr>
@@ -4427,7 +4427,7 @@
       </p:sp>
       <p:sp>
         <p:nvSpPr>
-          <p:cNvPr id="32" name="S10-mark301"/>
+          <p:cNvPr id="32" name="S10-mark299"/>
           <p:cNvSpPr/>
           <p:nvPr/>
         </p:nvSpPr>
@@ -4450,7 +4450,7 @@
       </p:sp>
       <p:sp>
         <p:nvSpPr>
-          <p:cNvPr id="33" name="S10-mark302"/>
+          <p:cNvPr id="33" name="S10-mark300"/>
           <p:cNvSpPr/>
           <p:nvPr/>
         </p:nvSpPr>
@@ -4473,7 +4473,7 @@
       </p:sp>
       <p:sp>
         <p:nvSpPr>
-          <p:cNvPr id="34" name="S10-mark303"/>
+          <p:cNvPr id="34" name="S10-mark301"/>
           <p:cNvSpPr/>
           <p:nvPr/>
         </p:nvSpPr>
@@ -4496,7 +4496,7 @@
       </p:sp>
       <p:sp>
         <p:nvSpPr>
-          <p:cNvPr id="35" name="S10-mark304"/>
+          <p:cNvPr id="35" name="S10-mark302"/>
           <p:cNvSpPr/>
           <p:nvPr/>
         </p:nvSpPr>
@@ -4519,7 +4519,7 @@
       </p:sp>
       <p:sp>
         <p:nvSpPr>
-          <p:cNvPr id="36" name="S10-mark305"/>
+          <p:cNvPr id="36" name="S10-mark303"/>
           <p:cNvSpPr/>
           <p:nvPr/>
         </p:nvSpPr>
@@ -4542,7 +4542,7 @@
       </p:sp>
       <p:sp>
         <p:nvSpPr>
-          <p:cNvPr id="37" name="S10-figure306" descr="모눈 위 직육면체의 전개도: 가로 5칸·세로 2칸인 면 2개, 가로 5칸·세로 3칸인 면 2개, 가로 2칸·세로 3칸인 면 2개"/>
+          <p:cNvPr id="37" name="S10-figure304" descr="모눈 위 직육면체의 전개도: 가로 5칸·세로 2칸인 면 2개, 가로 5칸·세로 3칸인 면 2개, 가로 2칸·세로 3칸인 면 2개"/>
           <p:cNvSpPr/>
           <p:nvPr/>
         </p:nvSpPr>
@@ -4586,7 +4586,7 @@
       </p:sp>
       <p:sp>
         <p:nvSpPr>
-          <p:cNvPr id="38" name="S10-mark307"/>
+          <p:cNvPr id="38" name="S10-mark305"/>
           <p:cNvSpPr/>
           <p:nvPr/>
         </p:nvSpPr>
@@ -4630,7 +4630,7 @@
       </p:sp>
       <p:sp>
         <p:nvSpPr>
-          <p:cNvPr id="39" name="S10-mark308"/>
+          <p:cNvPr id="39" name="S10-mark306"/>
           <p:cNvSpPr/>
           <p:nvPr/>
         </p:nvSpPr>
@@ -4674,7 +4674,7 @@
       </p:sp>
       <p:sp>
         <p:nvSpPr>
-          <p:cNvPr id="40" name="S10-mark309"/>
+          <p:cNvPr id="40" name="S10-mark307"/>
           <p:cNvSpPr/>
           <p:nvPr/>
         </p:nvSpPr>
@@ -4718,7 +4718,7 @@
       </p:sp>
       <p:sp>
         <p:nvSpPr>
-          <p:cNvPr id="41" name="S10-mark310"/>
+          <p:cNvPr id="41" name="S10-mark308"/>
           <p:cNvSpPr/>
           <p:nvPr/>
         </p:nvSpPr>
@@ -4762,7 +4762,7 @@
       </p:sp>
       <p:sp>
         <p:nvSpPr>
-          <p:cNvPr id="42" name="S10-mark311"/>
+          <p:cNvPr id="42" name="S10-mark309"/>
           <p:cNvSpPr/>
           <p:nvPr/>
         </p:nvSpPr>
@@ -4806,7 +4806,7 @@
       </p:sp>
       <p:sp>
         <p:nvSpPr>
-          <p:cNvPr id="43" name="S10-chip312"/>
+          <p:cNvPr id="43" name="S10-chip310"/>
           <p:cNvSpPr txBox="1"/>
           <p:nvPr/>
         </p:nvSpPr>
@@ -4853,7 +4853,7 @@
       </p:sp>
       <p:sp>
         <p:nvSpPr>
-          <p:cNvPr id="44" name="S10-text313"/>
+          <p:cNvPr id="44" name="S10-text311"/>
           <p:cNvSpPr txBox="1"/>
           <p:nvPr/>
         </p:nvSpPr>
@@ -4909,7 +4909,7 @@
       </p:sp>
       <p:sp>
         <p:nvSpPr>
-          <p:cNvPr id="45" name="S10-chip314"/>
+          <p:cNvPr id="45" name="S10-chip312"/>
           <p:cNvSpPr txBox="1"/>
           <p:nvPr/>
         </p:nvSpPr>
@@ -4956,7 +4956,7 @@
       </p:sp>
       <p:sp>
         <p:nvSpPr>
-          <p:cNvPr id="46" name="S10-text315"/>
+          <p:cNvPr id="46" name="S10-text313"/>
           <p:cNvSpPr txBox="1"/>
           <p:nvPr/>
         </p:nvSpPr>
@@ -5012,7 +5012,7 @@
       </p:sp>
       <p:sp>
         <p:nvSpPr>
-          <p:cNvPr id="47" name="S10-chip316"/>
+          <p:cNvPr id="47" name="S10-chip314"/>
           <p:cNvSpPr txBox="1"/>
           <p:nvPr/>
         </p:nvSpPr>
@@ -5059,7 +5059,7 @@
       </p:sp>
       <p:sp>
         <p:nvSpPr>
-          <p:cNvPr id="48" name="S10-text317"/>
+          <p:cNvPr id="48" name="S10-text315"/>
           <p:cNvSpPr txBox="1"/>
           <p:nvPr/>
         </p:nvSpPr>
@@ -5229,7 +5229,7 @@
       </p:sp>
       <p:sp>
         <p:nvSpPr>
-          <p:cNvPr id="3" name="S11-card318"/>
+          <p:cNvPr id="3" name="S11-card316"/>
           <p:cNvSpPr/>
           <p:nvPr/>
         </p:nvSpPr>
@@ -5256,7 +5256,7 @@
       </p:sp>
       <p:sp>
         <p:nvSpPr>
-          <p:cNvPr id="4" name="S11-cardtext319"/>
+          <p:cNvPr id="4" name="S11-cardtext317"/>
           <p:cNvSpPr txBox="1"/>
           <p:nvPr/>
         </p:nvSpPr>
@@ -5298,7 +5298,7 @@
       </p:sp>
       <p:sp>
         <p:nvSpPr>
-          <p:cNvPr id="5" name="S11-chip320"/>
+          <p:cNvPr id="5" name="S11-chip318"/>
           <p:cNvSpPr txBox="1"/>
           <p:nvPr/>
         </p:nvSpPr>
@@ -5345,7 +5345,7 @@
       </p:sp>
       <p:sp>
         <p:nvSpPr>
-          <p:cNvPr id="6" name="S11-text321"/>
+          <p:cNvPr id="6" name="S11-text319"/>
           <p:cNvSpPr txBox="1"/>
           <p:nvPr/>
         </p:nvSpPr>
@@ -5384,7 +5384,7 @@
       </p:sp>
       <p:sp>
         <p:nvSpPr>
-          <p:cNvPr id="7" name="S11-text322"/>
+          <p:cNvPr id="7" name="S11-text320"/>
           <p:cNvSpPr txBox="1"/>
           <p:nvPr/>
         </p:nvSpPr>
@@ -5423,7 +5423,7 @@
       </p:sp>
       <p:sp>
         <p:nvSpPr>
-          <p:cNvPr id="8" name="S11-text323"/>
+          <p:cNvPr id="8" name="S11-text321"/>
           <p:cNvSpPr txBox="1"/>
           <p:nvPr/>
         </p:nvSpPr>
@@ -5462,7 +5462,7 @@
       </p:sp>
       <p:sp>
         <p:nvSpPr>
-          <p:cNvPr id="9" name="S11-text324"/>
+          <p:cNvPr id="9" name="S11-text322"/>
           <p:cNvSpPr txBox="1"/>
           <p:nvPr/>
         </p:nvSpPr>
@@ -5501,7 +5501,7 @@
       </p:sp>
       <p:sp>
         <p:nvSpPr>
-          <p:cNvPr id="10" name="S11-text325"/>
+          <p:cNvPr id="10" name="S11-text323"/>
           <p:cNvSpPr txBox="1"/>
           <p:nvPr/>
         </p:nvSpPr>
@@ -5540,7 +5540,7 @@
       </p:sp>
       <p:sp>
         <p:nvSpPr>
-          <p:cNvPr id="11" name="S11-text326"/>
+          <p:cNvPr id="11" name="S11-text324"/>
           <p:cNvSpPr txBox="1"/>
           <p:nvPr/>
         </p:nvSpPr>
@@ -5579,7 +5579,7 @@
       </p:sp>
       <p:sp>
         <p:nvSpPr>
-          <p:cNvPr id="12" name="S11-chip327"/>
+          <p:cNvPr id="12" name="S11-chip325"/>
           <p:cNvSpPr txBox="1"/>
           <p:nvPr/>
         </p:nvSpPr>
@@ -5626,7 +5626,7 @@
       </p:sp>
       <p:sp>
         <p:nvSpPr>
-          <p:cNvPr id="13" name="S11-text328"/>
+          <p:cNvPr id="13" name="S11-text326"/>
           <p:cNvSpPr txBox="1"/>
           <p:nvPr/>
         </p:nvSpPr>
@@ -5665,7 +5665,7 @@
       </p:sp>
       <p:sp>
         <p:nvSpPr>
-          <p:cNvPr id="14" name="S11-text329"/>
+          <p:cNvPr id="14" name="S11-text327"/>
           <p:cNvSpPr txBox="1"/>
           <p:nvPr/>
         </p:nvSpPr>
@@ -5704,7 +5704,7 @@
       </p:sp>
       <p:sp>
         <p:nvSpPr>
-          <p:cNvPr id="15" name="S11-text330"/>
+          <p:cNvPr id="15" name="S11-text328"/>
           <p:cNvSpPr txBox="1"/>
           <p:nvPr/>
         </p:nvSpPr>
@@ -5743,7 +5743,7 @@
       </p:sp>
       <p:sp>
         <p:nvSpPr>
-          <p:cNvPr id="16" name="S11-text331"/>
+          <p:cNvPr id="16" name="S11-text329"/>
           <p:cNvSpPr txBox="1"/>
           <p:nvPr/>
         </p:nvSpPr>
@@ -5774,7 +5774,7 @@
                 <a:ea typeface="맑은 고딕" pitchFamily="34" charset="-122"/>
                 <a:cs typeface="맑은 고딕" pitchFamily="34" charset="-120"/>
               </a:rPr>
-              <a:t>8 × 5 × 2(부피의 식)</a:t>
+              <a:t>세 길이를 곱함</a:t>
             </a:r>
             <a:endParaRPr lang="ko-KR" sz="2200" dirty="0"/>
           </a:p>
@@ -5896,7 +5896,7 @@
       </p:sp>
       <p:sp>
         <p:nvSpPr>
-          <p:cNvPr id="3" name="S12-text332"/>
+          <p:cNvPr id="3" name="S12-text330"/>
           <p:cNvSpPr txBox="1"/>
           <p:nvPr/>
         </p:nvSpPr>
@@ -5935,7 +5935,7 @@
       </p:sp>
       <p:sp>
         <p:nvSpPr>
-          <p:cNvPr id="4" name="S12-card333"/>
+          <p:cNvPr id="4" name="S12-card331"/>
           <p:cNvSpPr/>
           <p:nvPr/>
         </p:nvSpPr>
@@ -5962,7 +5962,7 @@
       </p:sp>
       <p:sp>
         <p:nvSpPr>
-          <p:cNvPr id="5" name="S12-cardtext334"/>
+          <p:cNvPr id="5" name="S12-cardtext332"/>
           <p:cNvSpPr txBox="1"/>
           <p:nvPr/>
         </p:nvSpPr>
@@ -6004,7 +6004,7 @@
       </p:sp>
       <p:sp>
         <p:nvSpPr>
-          <p:cNvPr id="6" name="S12-chip335"/>
+          <p:cNvPr id="6" name="S12-chip333"/>
           <p:cNvSpPr txBox="1"/>
           <p:nvPr/>
         </p:nvSpPr>
@@ -6051,7 +6051,7 @@
       </p:sp>
       <p:sp>
         <p:nvSpPr>
-          <p:cNvPr id="7" name="S12-card336"/>
+          <p:cNvPr id="7" name="S12-card334"/>
           <p:cNvSpPr/>
           <p:nvPr/>
         </p:nvSpPr>
@@ -6078,7 +6078,7 @@
       </p:sp>
       <p:sp>
         <p:nvSpPr>
-          <p:cNvPr id="8" name="S12-cardtext337"/>
+          <p:cNvPr id="8" name="S12-cardtext335"/>
           <p:cNvSpPr txBox="1"/>
           <p:nvPr/>
         </p:nvSpPr>
@@ -6140,7 +6140,7 @@
       </p:sp>
       <p:sp>
         <p:nvSpPr>
-          <p:cNvPr id="9" name="S12-chip338"/>
+          <p:cNvPr id="9" name="S12-chip336"/>
           <p:cNvSpPr txBox="1"/>
           <p:nvPr/>
         </p:nvSpPr>
@@ -6187,7 +6187,7 @@
       </p:sp>
       <p:sp>
         <p:nvSpPr>
-          <p:cNvPr id="10" name="S12-card339"/>
+          <p:cNvPr id="10" name="S12-card337"/>
           <p:cNvSpPr/>
           <p:nvPr/>
         </p:nvSpPr>
@@ -6214,7 +6214,7 @@
       </p:sp>
       <p:sp>
         <p:nvSpPr>
-          <p:cNvPr id="11" name="S12-cardtext340"/>
+          <p:cNvPr id="11" name="S12-cardtext338"/>
           <p:cNvSpPr txBox="1"/>
           <p:nvPr/>
         </p:nvSpPr>
@@ -6256,7 +6256,7 @@
       </p:sp>
       <p:sp>
         <p:nvSpPr>
-          <p:cNvPr id="12" name="S12-chip341"/>
+          <p:cNvPr id="12" name="S12-chip339"/>
           <p:cNvSpPr txBox="1"/>
           <p:nvPr/>
         </p:nvSpPr>
@@ -6303,7 +6303,7 @@
       </p:sp>
       <p:sp>
         <p:nvSpPr>
-          <p:cNvPr id="13" name="S12-card342"/>
+          <p:cNvPr id="13" name="S12-card340"/>
           <p:cNvSpPr/>
           <p:nvPr/>
         </p:nvSpPr>
@@ -6330,7 +6330,7 @@
       </p:sp>
       <p:sp>
         <p:nvSpPr>
-          <p:cNvPr id="14" name="S12-cardtext343"/>
+          <p:cNvPr id="14" name="S12-cardtext341"/>
           <p:cNvSpPr txBox="1"/>
           <p:nvPr/>
         </p:nvSpPr>
@@ -6392,7 +6392,7 @@
       </p:sp>
       <p:sp>
         <p:nvSpPr>
-          <p:cNvPr id="15" name="S12-chip344"/>
+          <p:cNvPr id="15" name="S12-chip342"/>
           <p:cNvSpPr txBox="1"/>
           <p:nvPr/>
         </p:nvSpPr>
@@ -6439,7 +6439,7 @@
       </p:sp>
       <p:sp>
         <p:nvSpPr>
-          <p:cNvPr id="16" name="S12-card345"/>
+          <p:cNvPr id="16" name="S12-card343"/>
           <p:cNvSpPr/>
           <p:nvPr/>
         </p:nvSpPr>
@@ -6466,7 +6466,7 @@
       </p:sp>
       <p:sp>
         <p:nvSpPr>
-          <p:cNvPr id="17" name="S12-cardtext346"/>
+          <p:cNvPr id="17" name="S12-cardtext344"/>
           <p:cNvSpPr txBox="1"/>
           <p:nvPr/>
         </p:nvSpPr>
@@ -6622,7 +6622,7 @@
       </p:sp>
       <p:sp>
         <p:nvSpPr>
-          <p:cNvPr id="3" name="S13-card347"/>
+          <p:cNvPr id="3" name="S13-card345"/>
           <p:cNvSpPr/>
           <p:nvPr/>
         </p:nvSpPr>
@@ -6649,7 +6649,7 @@
       </p:sp>
       <p:sp>
         <p:nvSpPr>
-          <p:cNvPr id="4" name="S13-cardtext348"/>
+          <p:cNvPr id="4" name="S13-cardtext346"/>
           <p:cNvSpPr txBox="1"/>
           <p:nvPr/>
         </p:nvSpPr>
@@ -6691,7 +6691,7 @@
       </p:sp>
       <p:sp>
         <p:nvSpPr>
-          <p:cNvPr id="5" name="S13-chip349"/>
+          <p:cNvPr id="5" name="S13-chip347"/>
           <p:cNvSpPr txBox="1"/>
           <p:nvPr/>
         </p:nvSpPr>
@@ -6738,7 +6738,7 @@
       </p:sp>
       <p:sp>
         <p:nvSpPr>
-          <p:cNvPr id="6" name="S13-chip350"/>
+          <p:cNvPr id="6" name="S13-chip348"/>
           <p:cNvSpPr txBox="1"/>
           <p:nvPr/>
         </p:nvSpPr>
@@ -6785,7 +6785,7 @@
       </p:sp>
       <p:sp>
         <p:nvSpPr>
-          <p:cNvPr id="7" name="S13-text351"/>
+          <p:cNvPr id="7" name="S13-text349"/>
           <p:cNvSpPr txBox="1"/>
           <p:nvPr/>
         </p:nvSpPr>
@@ -6824,7 +6824,7 @@
       </p:sp>
       <p:sp>
         <p:nvSpPr>
-          <p:cNvPr id="8" name="S13-text352"/>
+          <p:cNvPr id="8" name="S13-text350"/>
           <p:cNvSpPr txBox="1"/>
           <p:nvPr/>
         </p:nvSpPr>
@@ -6880,7 +6880,7 @@
       </p:sp>
       <p:sp>
         <p:nvSpPr>
-          <p:cNvPr id="9" name="S13-text353"/>
+          <p:cNvPr id="9" name="S13-text351"/>
           <p:cNvSpPr txBox="1"/>
           <p:nvPr/>
         </p:nvSpPr>
@@ -6953,7 +6953,7 @@
       </p:sp>
       <p:sp>
         <p:nvSpPr>
-          <p:cNvPr id="10" name="S13-text354"/>
+          <p:cNvPr id="10" name="S13-text352"/>
           <p:cNvSpPr txBox="1"/>
           <p:nvPr/>
         </p:nvSpPr>
@@ -7009,7 +7009,7 @@
       </p:sp>
       <p:sp>
         <p:nvSpPr>
-          <p:cNvPr id="11" name="S13-text355"/>
+          <p:cNvPr id="11" name="S13-text353"/>
           <p:cNvSpPr txBox="1"/>
           <p:nvPr/>
         </p:nvSpPr>
@@ -7162,7 +7162,7 @@
       </p:sp>
       <p:sp>
         <p:nvSpPr>
-          <p:cNvPr id="3" name="S14-text356"/>
+          <p:cNvPr id="3" name="S14-text354"/>
           <p:cNvSpPr txBox="1"/>
           <p:nvPr/>
         </p:nvSpPr>
@@ -7201,7 +7201,7 @@
       </p:sp>
       <p:sp>
         <p:nvSpPr>
-          <p:cNvPr id="4" name="S14-cell357"/>
+          <p:cNvPr id="4" name="S14-cell355"/>
           <p:cNvSpPr/>
           <p:nvPr/>
         </p:nvSpPr>
@@ -7226,7 +7226,7 @@
       </p:sp>
       <p:sp>
         <p:nvSpPr>
-          <p:cNvPr id="5" name="S14-cell358"/>
+          <p:cNvPr id="5" name="S14-cell356"/>
           <p:cNvSpPr/>
           <p:nvPr/>
         </p:nvSpPr>
@@ -7251,7 +7251,7 @@
       </p:sp>
       <p:sp>
         <p:nvSpPr>
-          <p:cNvPr id="6" name="S14-cell359"/>
+          <p:cNvPr id="6" name="S14-cell357"/>
           <p:cNvSpPr/>
           <p:nvPr/>
         </p:nvSpPr>
@@ -7276,7 +7276,7 @@
       </p:sp>
       <p:sp>
         <p:nvSpPr>
-          <p:cNvPr id="7" name="S14-cell360"/>
+          <p:cNvPr id="7" name="S14-cell358"/>
           <p:cNvSpPr/>
           <p:nvPr/>
         </p:nvSpPr>
@@ -7301,7 +7301,7 @@
       </p:sp>
       <p:sp>
         <p:nvSpPr>
-          <p:cNvPr id="8" name="S14-cell361"/>
+          <p:cNvPr id="8" name="S14-cell359"/>
           <p:cNvSpPr/>
           <p:nvPr/>
         </p:nvSpPr>
@@ -7326,7 +7326,7 @@
       </p:sp>
       <p:sp>
         <p:nvSpPr>
-          <p:cNvPr id="9" name="S14-cell362"/>
+          <p:cNvPr id="9" name="S14-cell360"/>
           <p:cNvSpPr/>
           <p:nvPr/>
         </p:nvSpPr>
@@ -7351,7 +7351,7 @@
       </p:sp>
       <p:sp>
         <p:nvSpPr>
-          <p:cNvPr id="10" name="S14-cell363"/>
+          <p:cNvPr id="10" name="S14-cell361"/>
           <p:cNvSpPr/>
           <p:nvPr/>
         </p:nvSpPr>
@@ -7376,7 +7376,7 @@
       </p:sp>
       <p:sp>
         <p:nvSpPr>
-          <p:cNvPr id="11" name="S14-cell364"/>
+          <p:cNvPr id="11" name="S14-cell362"/>
           <p:cNvSpPr/>
           <p:nvPr/>
         </p:nvSpPr>
@@ -7401,7 +7401,7 @@
       </p:sp>
       <p:sp>
         <p:nvSpPr>
-          <p:cNvPr id="12" name="S14-cell365"/>
+          <p:cNvPr id="12" name="S14-cell363"/>
           <p:cNvSpPr/>
           <p:nvPr/>
         </p:nvSpPr>
@@ -7426,7 +7426,7 @@
       </p:sp>
       <p:sp>
         <p:nvSpPr>
-          <p:cNvPr id="13" name="S14-cell366"/>
+          <p:cNvPr id="13" name="S14-cell364"/>
           <p:cNvSpPr/>
           <p:nvPr/>
         </p:nvSpPr>
@@ -7451,7 +7451,7 @@
       </p:sp>
       <p:sp>
         <p:nvSpPr>
-          <p:cNvPr id="14" name="S14-cell367"/>
+          <p:cNvPr id="14" name="S14-cell365"/>
           <p:cNvSpPr/>
           <p:nvPr/>
         </p:nvSpPr>
@@ -7476,7 +7476,7 @@
       </p:sp>
       <p:sp>
         <p:nvSpPr>
-          <p:cNvPr id="15" name="S14-cell368"/>
+          <p:cNvPr id="15" name="S14-cell366"/>
           <p:cNvSpPr/>
           <p:nvPr/>
         </p:nvSpPr>
@@ -7501,7 +7501,7 @@
       </p:sp>
       <p:sp>
         <p:nvSpPr>
-          <p:cNvPr id="16" name="S14-cell369"/>
+          <p:cNvPr id="16" name="S14-cell367"/>
           <p:cNvSpPr/>
           <p:nvPr/>
         </p:nvSpPr>
@@ -7526,7 +7526,7 @@
       </p:sp>
       <p:sp>
         <p:nvSpPr>
-          <p:cNvPr id="17" name="S14-cell370"/>
+          <p:cNvPr id="17" name="S14-cell368"/>
           <p:cNvSpPr/>
           <p:nvPr/>
         </p:nvSpPr>
@@ -7551,7 +7551,7 @@
       </p:sp>
       <p:sp>
         <p:nvSpPr>
-          <p:cNvPr id="18" name="S14-cell371"/>
+          <p:cNvPr id="18" name="S14-cell369"/>
           <p:cNvSpPr/>
           <p:nvPr/>
         </p:nvSpPr>
@@ -7576,7 +7576,7 @@
       </p:sp>
       <p:sp>
         <p:nvSpPr>
-          <p:cNvPr id="19" name="S14-figure372" descr="가로 5칸, 세로 3칸인 직사각형: 15칸 모두 색칠"/>
+          <p:cNvPr id="19" name="S14-figure370" descr="가로 5칸, 세로 3칸인 직사각형: 15칸 모두 색칠"/>
           <p:cNvSpPr/>
           <p:nvPr/>
         </p:nvSpPr>
@@ -7603,7 +7603,7 @@
       </p:sp>
       <p:sp>
         <p:nvSpPr>
-          <p:cNvPr id="20" name="S14-card373"/>
+          <p:cNvPr id="20" name="S14-card371"/>
           <p:cNvSpPr/>
           <p:nvPr/>
         </p:nvSpPr>
@@ -7630,7 +7630,7 @@
       </p:sp>
       <p:sp>
         <p:nvSpPr>
-          <p:cNvPr id="21" name="S14-cardtext374"/>
+          <p:cNvPr id="21" name="S14-cardtext372"/>
           <p:cNvSpPr txBox="1"/>
           <p:nvPr/>
         </p:nvSpPr>
@@ -7692,7 +7692,7 @@
       </p:sp>
       <p:sp>
         <p:nvSpPr>
-          <p:cNvPr id="22" name="S14-card375"/>
+          <p:cNvPr id="22" name="S14-card373"/>
           <p:cNvSpPr/>
           <p:nvPr/>
         </p:nvSpPr>
@@ -7719,7 +7719,7 @@
       </p:sp>
       <p:sp>
         <p:nvSpPr>
-          <p:cNvPr id="23" name="S14-cardtext376"/>
+          <p:cNvPr id="23" name="S14-cardtext374"/>
           <p:cNvSpPr txBox="1"/>
           <p:nvPr/>
         </p:nvSpPr>
@@ -7921,8 +7921,8 @@
         </p:nvSpPr>
         <p:spPr>
           <a:xfrm>
-            <a:off x="6553962" y="3268980"/>
-            <a:ext cx="3657600" cy="1828800"/>
+            <a:off x="6361176" y="3019530"/>
+            <a:ext cx="3167876" cy="1583938"/>
           </a:xfrm>
           <a:custGeom>
             <a:avLst/>
@@ -7931,15 +7931,15 @@
             <a:cxnLst/>
             <a:rect l="l" t="t" r="r" b="b"/>
             <a:pathLst>
-              <a:path w="3657600" h="1828800">
+              <a:path w="3167876" h="1583938">
                 <a:moveTo>
-                  <a:pt x="0" y="1828800"/>
+                  <a:pt x="0" y="1583938"/>
                 </a:moveTo>
                 <a:lnTo>
-                  <a:pt x="3657600" y="1828800"/>
-                </a:lnTo>
-                <a:lnTo>
-                  <a:pt x="3657600" y="0"/>
+                  <a:pt x="3167876" y="1583938"/>
+                </a:lnTo>
+                <a:lnTo>
+                  <a:pt x="3167876" y="0"/>
                 </a:lnTo>
                 <a:lnTo>
                   <a:pt x="0" y="0"/>
@@ -7967,8 +7967,8 @@
         </p:nvSpPr>
         <p:spPr>
           <a:xfrm>
-            <a:off x="6553962" y="2446020"/>
-            <a:ext cx="4809744" cy="822960"/>
+            <a:off x="6361176" y="2306758"/>
+            <a:ext cx="4165756" cy="712772"/>
           </a:xfrm>
           <a:custGeom>
             <a:avLst/>
@@ -7977,18 +7977,18 @@
             <a:cxnLst/>
             <a:rect l="l" t="t" r="r" b="b"/>
             <a:pathLst>
-              <a:path w="4809744" h="822960">
+              <a:path w="4165756" h="712772">
                 <a:moveTo>
-                  <a:pt x="0" y="822960"/>
+                  <a:pt x="0" y="712772"/>
                 </a:moveTo>
                 <a:lnTo>
-                  <a:pt x="3657600" y="822960"/>
-                </a:lnTo>
-                <a:lnTo>
-                  <a:pt x="4809744" y="0"/>
-                </a:lnTo>
-                <a:lnTo>
-                  <a:pt x="1152144" y="0"/>
+                  <a:pt x="3167876" y="712772"/>
+                </a:lnTo>
+                <a:lnTo>
+                  <a:pt x="4165756" y="0"/>
+                </a:lnTo>
+                <a:lnTo>
+                  <a:pt x="997881" y="0"/>
                 </a:lnTo>
                 <a:close/>
               </a:path>
@@ -8013,8 +8013,8 @@
         </p:nvSpPr>
         <p:spPr>
           <a:xfrm>
-            <a:off x="10211562" y="2446020"/>
-            <a:ext cx="1152144" cy="2651760"/>
+            <a:off x="9529052" y="2306758"/>
+            <a:ext cx="997881" cy="2296710"/>
           </a:xfrm>
           <a:custGeom>
             <a:avLst/>
@@ -8023,18 +8023,18 @@
             <a:cxnLst/>
             <a:rect l="l" t="t" r="r" b="b"/>
             <a:pathLst>
-              <a:path w="1152144" h="2651760">
+              <a:path w="997881" h="2296710">
                 <a:moveTo>
-                  <a:pt x="0" y="2651760"/>
+                  <a:pt x="0" y="2296710"/>
                 </a:moveTo>
                 <a:lnTo>
-                  <a:pt x="1152144" y="1828800"/>
-                </a:lnTo>
-                <a:lnTo>
-                  <a:pt x="1152144" y="0"/>
-                </a:lnTo>
-                <a:lnTo>
-                  <a:pt x="0" y="822960"/>
+                  <a:pt x="997881" y="1583938"/>
+                </a:lnTo>
+                <a:lnTo>
+                  <a:pt x="997881" y="0"/>
+                </a:lnTo>
+                <a:lnTo>
+                  <a:pt x="0" y="712772"/>
                 </a:lnTo>
                 <a:close/>
               </a:path>
@@ -8059,8 +8059,8 @@
         </p:nvSpPr>
         <p:spPr>
           <a:xfrm>
-            <a:off x="7706106" y="4274820"/>
-            <a:ext cx="3657600" cy="0"/>
+            <a:off x="7359057" y="3890695"/>
+            <a:ext cx="3167876" cy="0"/>
           </a:xfrm>
           <a:prstGeom prst="line">
             <a:avLst/>
@@ -8082,8 +8082,8 @@
         </p:nvSpPr>
         <p:spPr>
           <a:xfrm flipV="1">
-            <a:off x="7706106" y="2446020"/>
-            <a:ext cx="0" cy="1828800"/>
+            <a:off x="7359057" y="2306758"/>
+            <a:ext cx="0" cy="1583938"/>
           </a:xfrm>
           <a:prstGeom prst="line">
             <a:avLst/>
@@ -8105,8 +8105,8 @@
         </p:nvSpPr>
         <p:spPr>
           <a:xfrm flipH="1">
-            <a:off x="6553962" y="4274820"/>
-            <a:ext cx="1152144" cy="822960"/>
+            <a:off x="6361176" y="3890695"/>
+            <a:ext cx="997881" cy="712772"/>
           </a:xfrm>
           <a:prstGeom prst="line">
             <a:avLst/>
@@ -8128,8 +8128,8 @@
         </p:nvSpPr>
         <p:spPr>
           <a:xfrm>
-            <a:off x="6553962" y="5097780"/>
-            <a:ext cx="3657600" cy="0"/>
+            <a:off x="6361176" y="4603467"/>
+            <a:ext cx="3167876" cy="0"/>
           </a:xfrm>
           <a:prstGeom prst="line">
             <a:avLst/>
@@ -8151,8 +8151,8 @@
         </p:nvSpPr>
         <p:spPr>
           <a:xfrm flipV="1">
-            <a:off x="10211562" y="4274820"/>
-            <a:ext cx="1152144" cy="822960"/>
+            <a:off x="9529052" y="3890695"/>
+            <a:ext cx="997881" cy="712772"/>
           </a:xfrm>
           <a:prstGeom prst="line">
             <a:avLst/>
@@ -8174,8 +8174,8 @@
         </p:nvSpPr>
         <p:spPr>
           <a:xfrm flipV="1">
-            <a:off x="11363706" y="2446020"/>
-            <a:ext cx="0" cy="1828800"/>
+            <a:off x="10526932" y="2306758"/>
+            <a:ext cx="0" cy="1583938"/>
           </a:xfrm>
           <a:prstGeom prst="line">
             <a:avLst/>
@@ -10386,7 +10386,7 @@
               <a:buNone/>
             </a:pPr>
             <a:r>
-              <a:rPr lang="ko-KR" altLang="en-US" sz="2800" dirty="0">
+              <a:rPr lang="en-US" altLang="ko-KR" sz="2800" dirty="0">
                 <a:solidFill>
                   <a:srgbClr val="1F2937"/>
                 </a:solidFill>
@@ -10394,7 +10394,7 @@
                 <a:ea typeface="맑은 고딕" pitchFamily="34" charset="-122"/>
                 <a:cs typeface="맑은 고딕" pitchFamily="34" charset="-120"/>
               </a:rPr>
-              <a:t>(세 면의 넓이의 합) × 2 = 52 cm²</a:t>
+              <a:t>(12 + 8 + 6) × 2 = 52 (cm²)</a:t>
             </a:r>
             <a:endParaRPr lang="ko-KR" sz="2800" dirty="0"/>
           </a:p>
@@ -10408,8 +10408,8 @@
         </p:nvSpPr>
         <p:spPr>
           <a:xfrm>
-            <a:off x="7850632" y="2879354"/>
-            <a:ext cx="2501137" cy="1250569"/>
+            <a:off x="7850632" y="2746957"/>
+            <a:ext cx="2005485" cy="1002742"/>
           </a:xfrm>
           <a:custGeom>
             <a:avLst/>
@@ -10418,15 +10418,15 @@
             <a:cxnLst/>
             <a:rect l="l" t="t" r="r" b="b"/>
             <a:pathLst>
-              <a:path w="2501137" h="1250569">
+              <a:path w="2005485" h="1002742">
                 <a:moveTo>
-                  <a:pt x="0" y="1250569"/>
+                  <a:pt x="0" y="1002742"/>
                 </a:moveTo>
                 <a:lnTo>
-                  <a:pt x="2501137" y="1250569"/>
-                </a:lnTo>
-                <a:lnTo>
-                  <a:pt x="2501137" y="0"/>
+                  <a:pt x="2005485" y="1002742"/>
+                </a:lnTo>
+                <a:lnTo>
+                  <a:pt x="2005485" y="0"/>
                 </a:lnTo>
                 <a:lnTo>
                   <a:pt x="0" y="0"/>
@@ -10454,8 +10454,8 @@
         </p:nvSpPr>
         <p:spPr>
           <a:xfrm>
-            <a:off x="7850632" y="2316598"/>
-            <a:ext cx="3288995" cy="562756"/>
+            <a:off x="7850632" y="2295723"/>
+            <a:ext cx="2637213" cy="451234"/>
           </a:xfrm>
           <a:custGeom>
             <a:avLst/>
@@ -10464,18 +10464,18 @@
             <a:cxnLst/>
             <a:rect l="l" t="t" r="r" b="b"/>
             <a:pathLst>
-              <a:path w="3288995" h="562756">
+              <a:path w="2637213" h="451234">
                 <a:moveTo>
-                  <a:pt x="0" y="562756"/>
+                  <a:pt x="0" y="451234"/>
                 </a:moveTo>
                 <a:lnTo>
-                  <a:pt x="2501137" y="562756"/>
-                </a:lnTo>
-                <a:lnTo>
-                  <a:pt x="3288995" y="0"/>
-                </a:lnTo>
-                <a:lnTo>
-                  <a:pt x="787858" y="0"/>
+                  <a:pt x="2005485" y="451234"/>
+                </a:lnTo>
+                <a:lnTo>
+                  <a:pt x="2637213" y="0"/>
+                </a:lnTo>
+                <a:lnTo>
+                  <a:pt x="631728" y="0"/>
                 </a:lnTo>
                 <a:close/>
               </a:path>
@@ -10500,8 +10500,8 @@
         </p:nvSpPr>
         <p:spPr>
           <a:xfrm>
-            <a:off x="10351769" y="2316598"/>
-            <a:ext cx="787858" cy="1813324"/>
+            <a:off x="9856117" y="2295723"/>
+            <a:ext cx="631728" cy="1453977"/>
           </a:xfrm>
           <a:custGeom>
             <a:avLst/>
@@ -10510,18 +10510,18 @@
             <a:cxnLst/>
             <a:rect l="l" t="t" r="r" b="b"/>
             <a:pathLst>
-              <a:path w="787858" h="1813324">
+              <a:path w="631728" h="1453977">
                 <a:moveTo>
-                  <a:pt x="0" y="1813324"/>
+                  <a:pt x="0" y="1453977"/>
                 </a:moveTo>
                 <a:lnTo>
-                  <a:pt x="787858" y="1250569"/>
-                </a:lnTo>
-                <a:lnTo>
-                  <a:pt x="787858" y="0"/>
-                </a:lnTo>
-                <a:lnTo>
-                  <a:pt x="0" y="562756"/>
+                  <a:pt x="631728" y="1002742"/>
+                </a:lnTo>
+                <a:lnTo>
+                  <a:pt x="631728" y="0"/>
+                </a:lnTo>
+                <a:lnTo>
+                  <a:pt x="0" y="451234"/>
                 </a:lnTo>
                 <a:close/>
               </a:path>
@@ -10546,8 +10546,8 @@
         </p:nvSpPr>
         <p:spPr>
           <a:xfrm>
-            <a:off x="8638490" y="3567166"/>
-            <a:ext cx="2501137" cy="0"/>
+            <a:off x="8482360" y="3298466"/>
+            <a:ext cx="2005485" cy="0"/>
           </a:xfrm>
           <a:prstGeom prst="line">
             <a:avLst/>
@@ -10569,8 +10569,8 @@
         </p:nvSpPr>
         <p:spPr>
           <a:xfrm flipV="1">
-            <a:off x="8638490" y="2316598"/>
-            <a:ext cx="0" cy="1250569"/>
+            <a:off x="8482360" y="2295723"/>
+            <a:ext cx="0" cy="1002742"/>
           </a:xfrm>
           <a:prstGeom prst="line">
             <a:avLst/>
@@ -10592,8 +10592,8 @@
         </p:nvSpPr>
         <p:spPr>
           <a:xfrm flipH="1">
-            <a:off x="7850632" y="3567166"/>
-            <a:ext cx="787858" cy="562756"/>
+            <a:off x="7850632" y="3298466"/>
+            <a:ext cx="631728" cy="451234"/>
           </a:xfrm>
           <a:prstGeom prst="line">
             <a:avLst/>
@@ -10615,8 +10615,8 @@
         </p:nvSpPr>
         <p:spPr>
           <a:xfrm>
-            <a:off x="7850632" y="4129922"/>
-            <a:ext cx="2501137" cy="0"/>
+            <a:off x="7850632" y="3749700"/>
+            <a:ext cx="2005485" cy="0"/>
           </a:xfrm>
           <a:prstGeom prst="line">
             <a:avLst/>
@@ -10638,8 +10638,8 @@
         </p:nvSpPr>
         <p:spPr>
           <a:xfrm flipV="1">
-            <a:off x="10351769" y="3567166"/>
-            <a:ext cx="787858" cy="562756"/>
+            <a:off x="9856117" y="3298466"/>
+            <a:ext cx="631728" cy="451234"/>
           </a:xfrm>
           <a:prstGeom prst="line">
             <a:avLst/>
@@ -10661,8 +10661,8 @@
         </p:nvSpPr>
         <p:spPr>
           <a:xfrm flipV="1">
-            <a:off x="11139627" y="2316598"/>
-            <a:ext cx="0" cy="1250569"/>
+            <a:off x="10487845" y="2295723"/>
+            <a:ext cx="0" cy="1002742"/>
           </a:xfrm>
           <a:prstGeom prst="line">
             <a:avLst/>
@@ -10684,7 +10684,7 @@
         </p:nvSpPr>
         <p:spPr>
           <a:xfrm>
-            <a:off x="8719439" y="4206757"/>
+            <a:off x="8471612" y="3826535"/>
             <a:ext cx="763524" cy="349250"/>
           </a:xfrm>
           <a:prstGeom prst="rect">
@@ -10723,7 +10723,7 @@
         </p:nvSpPr>
         <p:spPr>
           <a:xfrm>
-            <a:off x="10593888" y="3995852"/>
+            <a:off x="10020171" y="3671390"/>
             <a:ext cx="763524" cy="349250"/>
           </a:xfrm>
           <a:prstGeom prst="rect">
@@ -10762,7 +10762,7 @@
         </p:nvSpPr>
         <p:spPr>
           <a:xfrm>
-            <a:off x="11143437" y="2767257"/>
+            <a:off x="10491655" y="2622469"/>
             <a:ext cx="763524" cy="349250"/>
           </a:xfrm>
           <a:prstGeom prst="rect">
@@ -11240,7 +11240,7 @@
                 <a:ea typeface="맑은 고딕" pitchFamily="34" charset="-122"/>
                 <a:cs typeface="맑은 고딕" pitchFamily="34" charset="-120"/>
               </a:rPr>
-              <a:t>모두</a:t>
+              <a:t>세 면의 합 × 2</a:t>
             </a:r>
             <a:endParaRPr lang="ko-KR" sz="2800" dirty="0"/>
           </a:p>
@@ -11271,7 +11271,7 @@
               <a:buNone/>
             </a:pPr>
             <a:r>
-              <a:rPr lang="ko-KR" altLang="en-US" sz="1600" b="1" dirty="0">
+              <a:rPr lang="ko-KR" altLang="en-US" sz="2800" b="1" dirty="0">
                 <a:solidFill>
                   <a:srgbClr val="1F2937"/>
                 </a:solidFill>
@@ -11279,9 +11279,9 @@
                 <a:ea typeface="맑은 고딕" pitchFamily="34" charset="-122"/>
                 <a:cs typeface="맑은 고딕" pitchFamily="34" charset="-120"/>
               </a:rPr>
-              <a:t>(12 + 8 + 6) × 2 = 52</a:t>
-            </a:r>
-            <a:endParaRPr lang="ko-KR" sz="1600" dirty="0"/>
+              <a:t>26 × 2 = 52</a:t>
+            </a:r>
+            <a:endParaRPr lang="ko-KR" sz="2800" dirty="0"/>
           </a:p>
         </p:txBody>
       </p:sp>
@@ -12605,7 +12605,7 @@
         </p:nvSpPr>
         <p:spPr>
           <a:xfrm>
-            <a:off x="1024204" y="3184284"/>
+            <a:off x="1024204" y="3928598"/>
             <a:ext cx="5484419" cy="0"/>
           </a:xfrm>
           <a:prstGeom prst="line">
@@ -12708,8 +12708,8 @@
         </p:nvSpPr>
         <p:spPr>
           <a:xfrm>
-            <a:off x="4221226" y="3597275"/>
-            <a:ext cx="657352" cy="349250"/>
+            <a:off x="2969514" y="2931310"/>
+            <a:ext cx="3160776" cy="349250"/>
           </a:xfrm>
           <a:prstGeom prst="rect">
             <a:avLst/>
@@ -12725,7 +12725,76 @@
               <a:buNone/>
             </a:pPr>
             <a:r>
-              <a:rPr lang="ko-KR" altLang="en-US" sz="2200" b="1" dirty="0">
+              <a:rPr lang="en-US" altLang="ko-KR" sz="2200" b="1" dirty="0">
+                <a:solidFill>
+                  <a:srgbClr val="1F2937"/>
+                </a:solidFill>
+                <a:latin typeface="맑은 고딕" pitchFamily="34" charset="0"/>
+                <a:ea typeface="맑은 고딕" pitchFamily="34" charset="-122"/>
+                <a:cs typeface="맑은 고딕" pitchFamily="34" charset="-120"/>
+              </a:rPr>
+              <a:t>4 + 3 + 4 + 3 = 14 (cm)</a:t>
+            </a:r>
+            <a:endParaRPr lang="ko-KR" sz="2200" dirty="0"/>
+          </a:p>
+        </p:txBody>
+      </p:sp>
+      <p:sp>
+        <p:nvSpPr>
+          <p:cNvPr id="48" name="S05-card168"/>
+          <p:cNvSpPr/>
+          <p:nvPr/>
+        </p:nvSpPr>
+        <p:spPr>
+          <a:xfrm>
+            <a:off x="7349947" y="1602740"/>
+            <a:ext cx="4290365" cy="1520952"/>
+          </a:xfrm>
+          <a:prstGeom prst="roundRect">
+            <a:avLst>
+              <a:gd name="adj" fmla="val 7214"/>
+            </a:avLst>
+          </a:prstGeom>
+          <a:solidFill>
+            <a:srgbClr val="EAF3F1"/>
+          </a:solidFill>
+          <a:ln w="12700">
+            <a:solidFill>
+              <a:srgbClr val="EAF3F1"/>
+            </a:solidFill>
+            <a:prstDash val="solid"/>
+          </a:ln>
+        </p:spPr>
+      </p:sp>
+      <p:sp>
+        <p:nvSpPr>
+          <p:cNvPr id="49" name="S05-cardtext169"/>
+          <p:cNvSpPr txBox="1"/>
+          <p:nvPr/>
+        </p:nvSpPr>
+        <p:spPr>
+          <a:xfrm>
+            <a:off x="7624267" y="1739900"/>
+            <a:ext cx="3741725" cy="1246632"/>
+          </a:xfrm>
+          <a:prstGeom prst="rect">
+            <a:avLst/>
+          </a:prstGeom>
+          <a:noFill/>
+          <a:ln/>
+        </p:spPr>
+        <p:txBody>
+          <a:bodyPr wrap="square" lIns="0" tIns="0" rIns="0" bIns="0" rtlCol="0" anchor="ctr"/>
+          <a:lstStyle/>
+          <a:p>
+            <a:pPr eaLnBrk="0" indent="0" marL="0">
+              <a:spcAft>
+                <a:spcPts val="600"/>
+              </a:spcAft>
+              <a:buNone/>
+            </a:pPr>
+            <a:r>
+              <a:rPr lang="ko-KR" altLang="en-US" sz="2800" b="1" dirty="0">
                 <a:solidFill>
                   <a:srgbClr val="1F2937"/>
                 </a:solidFill>
@@ -12735,114 +12804,6 @@
               </a:rPr>
               <a:t>옆면</a:t>
             </a:r>
-            <a:endParaRPr lang="ko-KR" sz="2200" dirty="0"/>
-          </a:p>
-        </p:txBody>
-      </p:sp>
-      <p:sp>
-        <p:nvSpPr>
-          <p:cNvPr id="48" name="S05-label169"/>
-          <p:cNvSpPr txBox="1"/>
-          <p:nvPr/>
-        </p:nvSpPr>
-        <p:spPr>
-          <a:xfrm>
-            <a:off x="3361258" y="2774612"/>
-            <a:ext cx="3160776" cy="349250"/>
-          </a:xfrm>
-          <a:prstGeom prst="rect">
-            <a:avLst/>
-          </a:prstGeom>
-          <a:noFill/>
-          <a:ln/>
-        </p:spPr>
-        <p:txBody>
-          <a:bodyPr wrap="square" lIns="0" tIns="0" rIns="0" bIns="0" rtlCol="0" anchor="ctr"/>
-          <a:lstStyle/>
-          <a:p>
-            <a:pPr eaLnBrk="0" algn="ctr" indent="0" marL="0">
-              <a:buNone/>
-            </a:pPr>
-            <a:r>
-              <a:rPr lang="en-US" altLang="ko-KR" sz="2200" b="1" dirty="0">
-                <a:solidFill>
-                  <a:srgbClr val="1F2937"/>
-                </a:solidFill>
-                <a:latin typeface="맑은 고딕" pitchFamily="34" charset="0"/>
-                <a:ea typeface="맑은 고딕" pitchFamily="34" charset="-122"/>
-                <a:cs typeface="맑은 고딕" pitchFamily="34" charset="-120"/>
-              </a:rPr>
-              <a:t>4 + 3 + 4 + 3 = 14 (cm)</a:t>
-            </a:r>
-            <a:endParaRPr lang="ko-KR" sz="2200" dirty="0"/>
-          </a:p>
-        </p:txBody>
-      </p:sp>
-      <p:sp>
-        <p:nvSpPr>
-          <p:cNvPr id="49" name="S05-card170"/>
-          <p:cNvSpPr/>
-          <p:nvPr/>
-        </p:nvSpPr>
-        <p:spPr>
-          <a:xfrm>
-            <a:off x="7349947" y="1602740"/>
-            <a:ext cx="4290365" cy="1520952"/>
-          </a:xfrm>
-          <a:prstGeom prst="roundRect">
-            <a:avLst>
-              <a:gd name="adj" fmla="val 7214"/>
-            </a:avLst>
-          </a:prstGeom>
-          <a:solidFill>
-            <a:srgbClr val="EAF3F1"/>
-          </a:solidFill>
-          <a:ln w="12700">
-            <a:solidFill>
-              <a:srgbClr val="EAF3F1"/>
-            </a:solidFill>
-            <a:prstDash val="solid"/>
-          </a:ln>
-        </p:spPr>
-      </p:sp>
-      <p:sp>
-        <p:nvSpPr>
-          <p:cNvPr id="50" name="S05-cardtext171"/>
-          <p:cNvSpPr txBox="1"/>
-          <p:nvPr/>
-        </p:nvSpPr>
-        <p:spPr>
-          <a:xfrm>
-            <a:off x="7624267" y="1739900"/>
-            <a:ext cx="3741725" cy="1246632"/>
-          </a:xfrm>
-          <a:prstGeom prst="rect">
-            <a:avLst/>
-          </a:prstGeom>
-          <a:noFill/>
-          <a:ln/>
-        </p:spPr>
-        <p:txBody>
-          <a:bodyPr wrap="square" lIns="0" tIns="0" rIns="0" bIns="0" rtlCol="0" anchor="ctr"/>
-          <a:lstStyle/>
-          <a:p>
-            <a:pPr eaLnBrk="0" indent="0" marL="0">
-              <a:spcAft>
-                <a:spcPts val="600"/>
-              </a:spcAft>
-              <a:buNone/>
-            </a:pPr>
-            <a:r>
-              <a:rPr lang="ko-KR" altLang="en-US" sz="2800" b="1" dirty="0">
-                <a:solidFill>
-                  <a:srgbClr val="1F2937"/>
-                </a:solidFill>
-                <a:latin typeface="맑은 고딕" pitchFamily="34" charset="0"/>
-                <a:ea typeface="맑은 고딕" pitchFamily="34" charset="-122"/>
-                <a:cs typeface="맑은 고딕" pitchFamily="34" charset="-120"/>
-              </a:rPr>
-              <a:t>옆면</a:t>
-            </a:r>
             <a:endParaRPr lang="ko-KR" sz="2800" dirty="0"/>
           </a:p>
           <a:p>
@@ -12889,7 +12850,7 @@
       </p:sp>
       <p:sp>
         <p:nvSpPr>
-          <p:cNvPr id="51" name="S05-card172"/>
+          <p:cNvPr id="50" name="S05-card170"/>
           <p:cNvSpPr/>
           <p:nvPr/>
         </p:nvSpPr>
@@ -12916,7 +12877,7 @@
       </p:sp>
       <p:sp>
         <p:nvSpPr>
-          <p:cNvPr id="52" name="S05-cardtext173"/>
+          <p:cNvPr id="51" name="S05-cardtext171"/>
           <p:cNvSpPr txBox="1"/>
           <p:nvPr/>
         </p:nvSpPr>
@@ -12978,7 +12939,7 @@
       </p:sp>
       <p:sp>
         <p:nvSpPr>
-          <p:cNvPr id="53" name="S05-card174"/>
+          <p:cNvPr id="52" name="S05-card172"/>
           <p:cNvSpPr/>
           <p:nvPr/>
         </p:nvSpPr>
@@ -13005,7 +12966,7 @@
       </p:sp>
       <p:sp>
         <p:nvSpPr>
-          <p:cNvPr id="54" name="S05-cardtext175"/>
+          <p:cNvPr id="53" name="S05-cardtext173"/>
           <p:cNvSpPr txBox="1"/>
           <p:nvPr/>
         </p:nvSpPr>
@@ -13181,7 +13142,7 @@
       </p:sp>
       <p:sp>
         <p:nvSpPr>
-          <p:cNvPr id="3" name="S06-card176"/>
+          <p:cNvPr id="3" name="S06-card174"/>
           <p:cNvSpPr/>
           <p:nvPr/>
         </p:nvSpPr>
@@ -13208,7 +13169,7 @@
       </p:sp>
       <p:sp>
         <p:nvSpPr>
-          <p:cNvPr id="4" name="S06-cardtext177"/>
+          <p:cNvPr id="4" name="S06-cardtext175"/>
           <p:cNvSpPr txBox="1"/>
           <p:nvPr/>
         </p:nvSpPr>
@@ -13250,7 +13211,7 @@
       </p:sp>
       <p:sp>
         <p:nvSpPr>
-          <p:cNvPr id="5" name="S06-card178"/>
+          <p:cNvPr id="5" name="S06-card176"/>
           <p:cNvSpPr/>
           <p:nvPr/>
         </p:nvSpPr>
@@ -13277,7 +13238,7 @@
       </p:sp>
       <p:sp>
         <p:nvSpPr>
-          <p:cNvPr id="6" name="S06-cardtext179"/>
+          <p:cNvPr id="6" name="S06-cardtext177"/>
           <p:cNvSpPr txBox="1"/>
           <p:nvPr/>
         </p:nvSpPr>
@@ -13319,7 +13280,7 @@
       </p:sp>
       <p:sp>
         <p:nvSpPr>
-          <p:cNvPr id="7" name="S06-chip180"/>
+          <p:cNvPr id="7" name="S06-chip178"/>
           <p:cNvSpPr txBox="1"/>
           <p:nvPr/>
         </p:nvSpPr>
@@ -13366,7 +13327,7 @@
       </p:sp>
       <p:sp>
         <p:nvSpPr>
-          <p:cNvPr id="8" name="S06-text181"/>
+          <p:cNvPr id="8" name="S06-text179"/>
           <p:cNvSpPr txBox="1"/>
           <p:nvPr/>
         </p:nvSpPr>
@@ -13405,7 +13366,7 @@
       </p:sp>
       <p:sp>
         <p:nvSpPr>
-          <p:cNvPr id="9" name="S06-chip182"/>
+          <p:cNvPr id="9" name="S06-chip180"/>
           <p:cNvSpPr txBox="1"/>
           <p:nvPr/>
         </p:nvSpPr>
@@ -13452,7 +13413,7 @@
       </p:sp>
       <p:sp>
         <p:nvSpPr>
-          <p:cNvPr id="10" name="S06-text183"/>
+          <p:cNvPr id="10" name="S06-text181"/>
           <p:cNvSpPr txBox="1"/>
           <p:nvPr/>
         </p:nvSpPr>
@@ -13605,7 +13566,7 @@
       </p:sp>
       <p:sp>
         <p:nvSpPr>
-          <p:cNvPr id="3" name="S07-card184"/>
+          <p:cNvPr id="3" name="S07-card182"/>
           <p:cNvSpPr/>
           <p:nvPr/>
         </p:nvSpPr>
@@ -13632,7 +13593,7 @@
       </p:sp>
       <p:sp>
         <p:nvSpPr>
-          <p:cNvPr id="4" name="S07-cardtext185"/>
+          <p:cNvPr id="4" name="S07-cardtext183"/>
           <p:cNvSpPr txBox="1"/>
           <p:nvPr/>
         </p:nvSpPr>
@@ -13674,14 +13635,14 @@
       </p:sp>
       <p:sp>
         <p:nvSpPr>
-          <p:cNvPr id="5" name="S07-figure186" descr="가로 5 cm, 세로 4 cm, 높이 3 cm인 직육면체"/>
-          <p:cNvSpPr/>
-          <p:nvPr/>
-        </p:nvSpPr>
-        <p:spPr>
-          <a:xfrm>
-            <a:off x="6778041" y="2635621"/>
-            <a:ext cx="3264660" cy="1958796"/>
+          <p:cNvPr id="5" name="S07-figure184" descr="가로 5 cm, 세로 4 cm, 높이 3 cm인 직육면체"/>
+          <p:cNvSpPr/>
+          <p:nvPr/>
+        </p:nvSpPr>
+        <p:spPr>
+          <a:xfrm>
+            <a:off x="6778041" y="2512726"/>
+            <a:ext cx="2732824" cy="1639694"/>
           </a:xfrm>
           <a:custGeom>
             <a:avLst/>
@@ -13690,15 +13651,15 @@
             <a:cxnLst/>
             <a:rect l="l" t="t" r="r" b="b"/>
             <a:pathLst>
-              <a:path w="3264660" h="1958796">
+              <a:path w="2732824" h="1639694">
                 <a:moveTo>
-                  <a:pt x="0" y="1958796"/>
+                  <a:pt x="0" y="1639694"/>
                 </a:moveTo>
                 <a:lnTo>
-                  <a:pt x="3264660" y="1958796"/>
-                </a:lnTo>
-                <a:lnTo>
-                  <a:pt x="3264660" y="0"/>
+                  <a:pt x="2732824" y="1639694"/>
+                </a:lnTo>
+                <a:lnTo>
+                  <a:pt x="2732824" y="0"/>
                 </a:lnTo>
                 <a:lnTo>
                   <a:pt x="0" y="0"/>
@@ -13720,14 +13681,14 @@
       </p:sp>
       <p:sp>
         <p:nvSpPr>
-          <p:cNvPr id="6" name="S07-mark187"/>
-          <p:cNvSpPr/>
-          <p:nvPr/>
-        </p:nvSpPr>
-        <p:spPr>
-          <a:xfrm>
-            <a:off x="6778041" y="1852103"/>
-            <a:ext cx="4361586" cy="783519"/>
+          <p:cNvPr id="6" name="S07-mark185"/>
+          <p:cNvSpPr/>
+          <p:nvPr/>
+        </p:nvSpPr>
+        <p:spPr>
+          <a:xfrm>
+            <a:off x="6778041" y="1856848"/>
+            <a:ext cx="3651052" cy="655878"/>
           </a:xfrm>
           <a:custGeom>
             <a:avLst/>
@@ -13736,18 +13697,18 @@
             <a:cxnLst/>
             <a:rect l="l" t="t" r="r" b="b"/>
             <a:pathLst>
-              <a:path w="4361586" h="783519">
+              <a:path w="3651052" h="655878">
                 <a:moveTo>
-                  <a:pt x="0" y="783519"/>
+                  <a:pt x="0" y="655878"/>
                 </a:moveTo>
                 <a:lnTo>
-                  <a:pt x="3264660" y="783519"/>
-                </a:lnTo>
-                <a:lnTo>
-                  <a:pt x="4361586" y="0"/>
-                </a:lnTo>
-                <a:lnTo>
-                  <a:pt x="1096926" y="0"/>
+                  <a:pt x="2732824" y="655878"/>
+                </a:lnTo>
+                <a:lnTo>
+                  <a:pt x="3651052" y="0"/>
+                </a:lnTo>
+                <a:lnTo>
+                  <a:pt x="918229" y="0"/>
                 </a:lnTo>
                 <a:close/>
               </a:path>
@@ -13766,14 +13727,14 @@
       </p:sp>
       <p:sp>
         <p:nvSpPr>
-          <p:cNvPr id="7" name="S07-mark188"/>
-          <p:cNvSpPr/>
-          <p:nvPr/>
-        </p:nvSpPr>
-        <p:spPr>
-          <a:xfrm>
-            <a:off x="10042701" y="1852103"/>
-            <a:ext cx="1096926" cy="2742315"/>
+          <p:cNvPr id="7" name="S07-mark186"/>
+          <p:cNvSpPr/>
+          <p:nvPr/>
+        </p:nvSpPr>
+        <p:spPr>
+          <a:xfrm>
+            <a:off x="9510864" y="1856848"/>
+            <a:ext cx="918229" cy="2295572"/>
           </a:xfrm>
           <a:custGeom>
             <a:avLst/>
@@ -13782,18 +13743,18 @@
             <a:cxnLst/>
             <a:rect l="l" t="t" r="r" b="b"/>
             <a:pathLst>
-              <a:path w="1096926" h="2742315">
+              <a:path w="918229" h="2295572">
                 <a:moveTo>
-                  <a:pt x="0" y="2742315"/>
+                  <a:pt x="0" y="2295572"/>
                 </a:moveTo>
                 <a:lnTo>
-                  <a:pt x="1096926" y="1958796"/>
-                </a:lnTo>
-                <a:lnTo>
-                  <a:pt x="1096926" y="0"/>
-                </a:lnTo>
-                <a:lnTo>
-                  <a:pt x="0" y="783519"/>
+                  <a:pt x="918229" y="1639694"/>
+                </a:lnTo>
+                <a:lnTo>
+                  <a:pt x="918229" y="0"/>
+                </a:lnTo>
+                <a:lnTo>
+                  <a:pt x="0" y="655878"/>
                 </a:lnTo>
                 <a:close/>
               </a:path>
@@ -13812,14 +13773,14 @@
       </p:sp>
       <p:sp>
         <p:nvSpPr>
-          <p:cNvPr id="8" name="S07-mark189"/>
-          <p:cNvSpPr/>
-          <p:nvPr/>
-        </p:nvSpPr>
-        <p:spPr>
-          <a:xfrm>
-            <a:off x="7874967" y="3810899"/>
-            <a:ext cx="3264660" cy="0"/>
+          <p:cNvPr id="8" name="S07-mark187"/>
+          <p:cNvSpPr/>
+          <p:nvPr/>
+        </p:nvSpPr>
+        <p:spPr>
+          <a:xfrm>
+            <a:off x="7696270" y="3496542"/>
+            <a:ext cx="2732824" cy="0"/>
           </a:xfrm>
           <a:prstGeom prst="line">
             <a:avLst/>
@@ -13835,14 +13796,14 @@
       </p:sp>
       <p:sp>
         <p:nvSpPr>
-          <p:cNvPr id="9" name="S07-mark190"/>
+          <p:cNvPr id="9" name="S07-mark188"/>
           <p:cNvSpPr/>
           <p:nvPr/>
         </p:nvSpPr>
         <p:spPr>
           <a:xfrm flipV="1">
-            <a:off x="7874967" y="1852103"/>
-            <a:ext cx="0" cy="1958796"/>
+            <a:off x="7696270" y="1856848"/>
+            <a:ext cx="0" cy="1639694"/>
           </a:xfrm>
           <a:prstGeom prst="line">
             <a:avLst/>
@@ -13858,14 +13819,14 @@
       </p:sp>
       <p:sp>
         <p:nvSpPr>
-          <p:cNvPr id="10" name="S07-mark191"/>
+          <p:cNvPr id="10" name="S07-mark189"/>
           <p:cNvSpPr/>
           <p:nvPr/>
         </p:nvSpPr>
         <p:spPr>
           <a:xfrm flipH="1">
-            <a:off x="6778041" y="3810899"/>
-            <a:ext cx="1096926" cy="783519"/>
+            <a:off x="6778041" y="3496542"/>
+            <a:ext cx="918229" cy="655878"/>
           </a:xfrm>
           <a:prstGeom prst="line">
             <a:avLst/>
@@ -13881,14 +13842,14 @@
       </p:sp>
       <p:sp>
         <p:nvSpPr>
-          <p:cNvPr id="11" name="S07-mark192"/>
-          <p:cNvSpPr/>
-          <p:nvPr/>
-        </p:nvSpPr>
-        <p:spPr>
-          <a:xfrm>
-            <a:off x="6778041" y="4594417"/>
-            <a:ext cx="3264660" cy="0"/>
+          <p:cNvPr id="11" name="S07-mark190"/>
+          <p:cNvSpPr/>
+          <p:nvPr/>
+        </p:nvSpPr>
+        <p:spPr>
+          <a:xfrm>
+            <a:off x="6778041" y="4152420"/>
+            <a:ext cx="2732824" cy="0"/>
           </a:xfrm>
           <a:prstGeom prst="line">
             <a:avLst/>
@@ -13904,14 +13865,14 @@
       </p:sp>
       <p:sp>
         <p:nvSpPr>
-          <p:cNvPr id="12" name="S07-mark193"/>
+          <p:cNvPr id="12" name="S07-mark191"/>
           <p:cNvSpPr/>
           <p:nvPr/>
         </p:nvSpPr>
         <p:spPr>
           <a:xfrm flipV="1">
-            <a:off x="10042701" y="3810899"/>
-            <a:ext cx="1096926" cy="783519"/>
+            <a:off x="9510864" y="3496542"/>
+            <a:ext cx="918229" cy="655878"/>
           </a:xfrm>
           <a:prstGeom prst="line">
             <a:avLst/>
@@ -13927,14 +13888,14 @@
       </p:sp>
       <p:sp>
         <p:nvSpPr>
-          <p:cNvPr id="13" name="S07-mark194"/>
+          <p:cNvPr id="13" name="S07-mark192"/>
           <p:cNvSpPr/>
           <p:nvPr/>
         </p:nvSpPr>
         <p:spPr>
           <a:xfrm flipV="1">
-            <a:off x="11139627" y="1852103"/>
-            <a:ext cx="0" cy="1958796"/>
+            <a:off x="10429093" y="1856848"/>
+            <a:ext cx="0" cy="1639694"/>
           </a:xfrm>
           <a:prstGeom prst="line">
             <a:avLst/>
@@ -13950,13 +13911,13 @@
       </p:sp>
       <p:sp>
         <p:nvSpPr>
-          <p:cNvPr id="14" name="S07-label196"/>
+          <p:cNvPr id="14" name="S07-label194"/>
           <p:cNvSpPr txBox="1"/>
           <p:nvPr/>
         </p:nvSpPr>
         <p:spPr>
           <a:xfrm>
-            <a:off x="8028609" y="4671252"/>
+            <a:off x="7762691" y="4229255"/>
             <a:ext cx="763524" cy="349250"/>
           </a:xfrm>
           <a:prstGeom prst="rect">
@@ -13989,13 +13950,13 @@
       </p:sp>
       <p:sp>
         <p:nvSpPr>
-          <p:cNvPr id="15" name="S07-label198"/>
+          <p:cNvPr id="15" name="S07-label196"/>
           <p:cNvSpPr txBox="1"/>
           <p:nvPr/>
         </p:nvSpPr>
         <p:spPr>
           <a:xfrm>
-            <a:off x="10439354" y="4349966"/>
+            <a:off x="9818169" y="3971789"/>
             <a:ext cx="763524" cy="349250"/>
           </a:xfrm>
           <a:prstGeom prst="rect">
@@ -14028,13 +13989,13 @@
       </p:sp>
       <p:sp>
         <p:nvSpPr>
-          <p:cNvPr id="16" name="S07-label200"/>
+          <p:cNvPr id="16" name="S07-label198"/>
           <p:cNvSpPr txBox="1"/>
           <p:nvPr/>
         </p:nvSpPr>
         <p:spPr>
           <a:xfrm>
-            <a:off x="11143437" y="2656876"/>
+            <a:off x="10432903" y="2502070"/>
             <a:ext cx="763524" cy="349250"/>
           </a:xfrm>
           <a:prstGeom prst="rect">
@@ -14067,7 +14028,7 @@
       </p:sp>
       <p:sp>
         <p:nvSpPr>
-          <p:cNvPr id="17" name="S07-chip201"/>
+          <p:cNvPr id="17" name="S07-chip199"/>
           <p:cNvSpPr txBox="1"/>
           <p:nvPr/>
         </p:nvSpPr>
@@ -14114,7 +14075,7 @@
       </p:sp>
       <p:sp>
         <p:nvSpPr>
-          <p:cNvPr id="18" name="S07-text202"/>
+          <p:cNvPr id="18" name="S07-text200"/>
           <p:cNvSpPr txBox="1"/>
           <p:nvPr/>
         </p:nvSpPr>
@@ -14170,7 +14131,7 @@
       </p:sp>
       <p:sp>
         <p:nvSpPr>
-          <p:cNvPr id="19" name="S07-chip203"/>
+          <p:cNvPr id="19" name="S07-chip201"/>
           <p:cNvSpPr txBox="1"/>
           <p:nvPr/>
         </p:nvSpPr>
@@ -14217,7 +14178,7 @@
       </p:sp>
       <p:sp>
         <p:nvSpPr>
-          <p:cNvPr id="20" name="S07-text204"/>
+          <p:cNvPr id="20" name="S07-text202"/>
           <p:cNvSpPr txBox="1"/>
           <p:nvPr/>
         </p:nvSpPr>
@@ -14256,7 +14217,7 @@
       </p:sp>
       <p:sp>
         <p:nvSpPr>
-          <p:cNvPr id="21" name="S07-chip205"/>
+          <p:cNvPr id="21" name="S07-chip203"/>
           <p:cNvSpPr txBox="1"/>
           <p:nvPr/>
         </p:nvSpPr>
@@ -14303,7 +14264,7 @@
       </p:sp>
       <p:sp>
         <p:nvSpPr>
-          <p:cNvPr id="22" name="S07-text206"/>
+          <p:cNvPr id="22" name="S07-text204"/>
           <p:cNvSpPr txBox="1"/>
           <p:nvPr/>
         </p:nvSpPr>
@@ -14473,7 +14434,7 @@
       </p:sp>
       <p:sp>
         <p:nvSpPr>
-          <p:cNvPr id="3" name="S08-text207"/>
+          <p:cNvPr id="3" name="S08-text205"/>
           <p:cNvSpPr txBox="1"/>
           <p:nvPr/>
         </p:nvSpPr>
@@ -14512,7 +14473,7 @@
       </p:sp>
       <p:sp>
         <p:nvSpPr>
-          <p:cNvPr id="4" name="S08-mark208"/>
+          <p:cNvPr id="4" name="S08-mark206"/>
           <p:cNvSpPr/>
           <p:nvPr/>
         </p:nvSpPr>
@@ -14553,7 +14514,7 @@
       </p:sp>
       <p:sp>
         <p:nvSpPr>
-          <p:cNvPr id="5" name="S08-mark209"/>
+          <p:cNvPr id="5" name="S08-mark207"/>
           <p:cNvSpPr/>
           <p:nvPr/>
         </p:nvSpPr>
@@ -14594,7 +14555,7 @@
       </p:sp>
       <p:sp>
         <p:nvSpPr>
-          <p:cNvPr id="6" name="S08-mark210"/>
+          <p:cNvPr id="6" name="S08-mark208"/>
           <p:cNvSpPr/>
           <p:nvPr/>
         </p:nvSpPr>
@@ -14635,7 +14596,7 @@
       </p:sp>
       <p:sp>
         <p:nvSpPr>
-          <p:cNvPr id="7" name="S08-mark211"/>
+          <p:cNvPr id="7" name="S08-mark209"/>
           <p:cNvSpPr/>
           <p:nvPr/>
         </p:nvSpPr>
@@ -14676,7 +14637,7 @@
       </p:sp>
       <p:sp>
         <p:nvSpPr>
-          <p:cNvPr id="8" name="S08-mark212"/>
+          <p:cNvPr id="8" name="S08-mark210"/>
           <p:cNvSpPr/>
           <p:nvPr/>
         </p:nvSpPr>
@@ -14717,7 +14678,7 @@
       </p:sp>
       <p:sp>
         <p:nvSpPr>
-          <p:cNvPr id="9" name="S08-mark213"/>
+          <p:cNvPr id="9" name="S08-mark211"/>
           <p:cNvSpPr/>
           <p:nvPr/>
         </p:nvSpPr>
@@ -14758,7 +14719,7 @@
       </p:sp>
       <p:sp>
         <p:nvSpPr>
-          <p:cNvPr id="10" name="S08-mark214"/>
+          <p:cNvPr id="10" name="S08-mark212"/>
           <p:cNvSpPr/>
           <p:nvPr/>
         </p:nvSpPr>
@@ -14781,7 +14742,7 @@
       </p:sp>
       <p:sp>
         <p:nvSpPr>
-          <p:cNvPr id="11" name="S08-mark215"/>
+          <p:cNvPr id="11" name="S08-mark213"/>
           <p:cNvSpPr/>
           <p:nvPr/>
         </p:nvSpPr>
@@ -14804,7 +14765,7 @@
       </p:sp>
       <p:sp>
         <p:nvSpPr>
-          <p:cNvPr id="12" name="S08-mark216"/>
+          <p:cNvPr id="12" name="S08-mark214"/>
           <p:cNvSpPr/>
           <p:nvPr/>
         </p:nvSpPr>
@@ -14827,7 +14788,7 @@
       </p:sp>
       <p:sp>
         <p:nvSpPr>
-          <p:cNvPr id="13" name="S08-mark217"/>
+          <p:cNvPr id="13" name="S08-mark215"/>
           <p:cNvSpPr/>
           <p:nvPr/>
         </p:nvSpPr>
@@ -14850,7 +14811,7 @@
       </p:sp>
       <p:sp>
         <p:nvSpPr>
-          <p:cNvPr id="14" name="S08-mark218"/>
+          <p:cNvPr id="14" name="S08-mark216"/>
           <p:cNvSpPr/>
           <p:nvPr/>
         </p:nvSpPr>
@@ -14873,7 +14834,7 @@
       </p:sp>
       <p:sp>
         <p:nvSpPr>
-          <p:cNvPr id="15" name="S08-mark219"/>
+          <p:cNvPr id="15" name="S08-mark217"/>
           <p:cNvSpPr/>
           <p:nvPr/>
         </p:nvSpPr>
@@ -14896,7 +14857,7 @@
       </p:sp>
       <p:sp>
         <p:nvSpPr>
-          <p:cNvPr id="16" name="S08-mark220"/>
+          <p:cNvPr id="16" name="S08-mark218"/>
           <p:cNvSpPr/>
           <p:nvPr/>
         </p:nvSpPr>
@@ -14919,7 +14880,7 @@
       </p:sp>
       <p:sp>
         <p:nvSpPr>
-          <p:cNvPr id="17" name="S08-mark221"/>
+          <p:cNvPr id="17" name="S08-mark219"/>
           <p:cNvSpPr/>
           <p:nvPr/>
         </p:nvSpPr>
@@ -14942,7 +14903,7 @@
       </p:sp>
       <p:sp>
         <p:nvSpPr>
-          <p:cNvPr id="18" name="S08-mark222"/>
+          <p:cNvPr id="18" name="S08-mark220"/>
           <p:cNvSpPr/>
           <p:nvPr/>
         </p:nvSpPr>
@@ -14965,7 +14926,7 @@
       </p:sp>
       <p:sp>
         <p:nvSpPr>
-          <p:cNvPr id="19" name="S08-mark223"/>
+          <p:cNvPr id="19" name="S08-mark221"/>
           <p:cNvSpPr/>
           <p:nvPr/>
         </p:nvSpPr>
@@ -14988,7 +14949,7 @@
       </p:sp>
       <p:sp>
         <p:nvSpPr>
-          <p:cNvPr id="20" name="S08-mark224"/>
+          <p:cNvPr id="20" name="S08-mark222"/>
           <p:cNvSpPr/>
           <p:nvPr/>
         </p:nvSpPr>
@@ -15011,7 +14972,7 @@
       </p:sp>
       <p:sp>
         <p:nvSpPr>
-          <p:cNvPr id="21" name="S08-mark225"/>
+          <p:cNvPr id="21" name="S08-mark223"/>
           <p:cNvSpPr/>
           <p:nvPr/>
         </p:nvSpPr>
@@ -15034,7 +14995,7 @@
       </p:sp>
       <p:sp>
         <p:nvSpPr>
-          <p:cNvPr id="22" name="S08-mark226"/>
+          <p:cNvPr id="22" name="S08-mark224"/>
           <p:cNvSpPr/>
           <p:nvPr/>
         </p:nvSpPr>
@@ -15057,7 +15018,7 @@
       </p:sp>
       <p:sp>
         <p:nvSpPr>
-          <p:cNvPr id="23" name="S08-mark227"/>
+          <p:cNvPr id="23" name="S08-mark225"/>
           <p:cNvSpPr/>
           <p:nvPr/>
         </p:nvSpPr>
@@ -15080,7 +15041,7 @@
       </p:sp>
       <p:sp>
         <p:nvSpPr>
-          <p:cNvPr id="24" name="S08-mark228"/>
+          <p:cNvPr id="24" name="S08-mark226"/>
           <p:cNvSpPr/>
           <p:nvPr/>
         </p:nvSpPr>
@@ -15103,7 +15064,7 @@
       </p:sp>
       <p:sp>
         <p:nvSpPr>
-          <p:cNvPr id="25" name="S08-mark229"/>
+          <p:cNvPr id="25" name="S08-mark227"/>
           <p:cNvSpPr/>
           <p:nvPr/>
         </p:nvSpPr>
@@ -15126,7 +15087,7 @@
       </p:sp>
       <p:sp>
         <p:nvSpPr>
-          <p:cNvPr id="26" name="S08-mark230"/>
+          <p:cNvPr id="26" name="S08-mark228"/>
           <p:cNvSpPr/>
           <p:nvPr/>
         </p:nvSpPr>
@@ -15149,7 +15110,7 @@
       </p:sp>
       <p:sp>
         <p:nvSpPr>
-          <p:cNvPr id="27" name="S08-mark231"/>
+          <p:cNvPr id="27" name="S08-mark229"/>
           <p:cNvSpPr/>
           <p:nvPr/>
         </p:nvSpPr>
@@ -15172,7 +15133,7 @@
       </p:sp>
       <p:sp>
         <p:nvSpPr>
-          <p:cNvPr id="28" name="S08-mark232"/>
+          <p:cNvPr id="28" name="S08-mark230"/>
           <p:cNvSpPr/>
           <p:nvPr/>
         </p:nvSpPr>
@@ -15195,7 +15156,7 @@
       </p:sp>
       <p:sp>
         <p:nvSpPr>
-          <p:cNvPr id="29" name="S08-mark233"/>
+          <p:cNvPr id="29" name="S08-mark231"/>
           <p:cNvSpPr/>
           <p:nvPr/>
         </p:nvSpPr>
@@ -15218,7 +15179,7 @@
       </p:sp>
       <p:sp>
         <p:nvSpPr>
-          <p:cNvPr id="30" name="S08-mark234"/>
+          <p:cNvPr id="30" name="S08-mark232"/>
           <p:cNvSpPr/>
           <p:nvPr/>
         </p:nvSpPr>
@@ -15241,7 +15202,7 @@
       </p:sp>
       <p:sp>
         <p:nvSpPr>
-          <p:cNvPr id="31" name="S08-mark235"/>
+          <p:cNvPr id="31" name="S08-mark233"/>
           <p:cNvSpPr/>
           <p:nvPr/>
         </p:nvSpPr>
@@ -15264,7 +15225,7 @@
       </p:sp>
       <p:sp>
         <p:nvSpPr>
-          <p:cNvPr id="32" name="S08-mark236"/>
+          <p:cNvPr id="32" name="S08-mark234"/>
           <p:cNvSpPr/>
           <p:nvPr/>
         </p:nvSpPr>
@@ -15287,7 +15248,7 @@
       </p:sp>
       <p:sp>
         <p:nvSpPr>
-          <p:cNvPr id="33" name="S08-mark237"/>
+          <p:cNvPr id="33" name="S08-mark235"/>
           <p:cNvSpPr/>
           <p:nvPr/>
         </p:nvSpPr>
@@ -15310,7 +15271,7 @@
       </p:sp>
       <p:sp>
         <p:nvSpPr>
-          <p:cNvPr id="34" name="S08-mark238"/>
+          <p:cNvPr id="34" name="S08-mark236"/>
           <p:cNvSpPr/>
           <p:nvPr/>
         </p:nvSpPr>
@@ -15333,7 +15294,7 @@
       </p:sp>
       <p:sp>
         <p:nvSpPr>
-          <p:cNvPr id="35" name="S08-mark239"/>
+          <p:cNvPr id="35" name="S08-mark237"/>
           <p:cNvSpPr/>
           <p:nvPr/>
         </p:nvSpPr>
@@ -15356,7 +15317,7 @@
       </p:sp>
       <p:sp>
         <p:nvSpPr>
-          <p:cNvPr id="36" name="S08-mark240"/>
+          <p:cNvPr id="36" name="S08-mark238"/>
           <p:cNvSpPr/>
           <p:nvPr/>
         </p:nvSpPr>
@@ -15379,7 +15340,7 @@
       </p:sp>
       <p:sp>
         <p:nvSpPr>
-          <p:cNvPr id="37" name="S08-figure241" descr="한 모서리가 3 cm인 정육면체의 전개도(모눈 위): 넓이 9 cm²인 정사각형 6개"/>
+          <p:cNvPr id="37" name="S08-figure239" descr="한 모서리가 3 cm인 정육면체의 전개도(모눈 위): 넓이 9 cm²인 정사각형 6개"/>
           <p:cNvSpPr/>
           <p:nvPr/>
         </p:nvSpPr>
@@ -15423,7 +15384,7 @@
       </p:sp>
       <p:sp>
         <p:nvSpPr>
-          <p:cNvPr id="38" name="S08-mark242"/>
+          <p:cNvPr id="38" name="S08-mark240"/>
           <p:cNvSpPr/>
           <p:nvPr/>
         </p:nvSpPr>
@@ -15467,7 +15428,7 @@
       </p:sp>
       <p:sp>
         <p:nvSpPr>
-          <p:cNvPr id="39" name="S08-mark243"/>
+          <p:cNvPr id="39" name="S08-mark241"/>
           <p:cNvSpPr/>
           <p:nvPr/>
         </p:nvSpPr>
@@ -15511,7 +15472,7 @@
       </p:sp>
       <p:sp>
         <p:nvSpPr>
-          <p:cNvPr id="40" name="S08-mark244"/>
+          <p:cNvPr id="40" name="S08-mark242"/>
           <p:cNvSpPr/>
           <p:nvPr/>
         </p:nvSpPr>
@@ -15555,7 +15516,7 @@
       </p:sp>
       <p:sp>
         <p:nvSpPr>
-          <p:cNvPr id="41" name="S08-mark245"/>
+          <p:cNvPr id="41" name="S08-mark243"/>
           <p:cNvSpPr/>
           <p:nvPr/>
         </p:nvSpPr>
@@ -15599,7 +15560,7 @@
       </p:sp>
       <p:sp>
         <p:nvSpPr>
-          <p:cNvPr id="42" name="S08-mark246"/>
+          <p:cNvPr id="42" name="S08-mark244"/>
           <p:cNvSpPr/>
           <p:nvPr/>
         </p:nvSpPr>
@@ -15643,7 +15604,7 @@
       </p:sp>
       <p:sp>
         <p:nvSpPr>
-          <p:cNvPr id="43" name="S08-label248"/>
+          <p:cNvPr id="43" name="S08-label246"/>
           <p:cNvSpPr txBox="1"/>
           <p:nvPr/>
         </p:nvSpPr>
@@ -15682,7 +15643,7 @@
       </p:sp>
       <p:sp>
         <p:nvSpPr>
-          <p:cNvPr id="44" name="S08-label250"/>
+          <p:cNvPr id="44" name="S08-label248"/>
           <p:cNvSpPr txBox="1"/>
           <p:nvPr/>
         </p:nvSpPr>
@@ -15721,7 +15682,7 @@
       </p:sp>
       <p:sp>
         <p:nvSpPr>
-          <p:cNvPr id="45" name="S08-label252"/>
+          <p:cNvPr id="45" name="S08-label250"/>
           <p:cNvSpPr txBox="1"/>
           <p:nvPr/>
         </p:nvSpPr>
@@ -15760,7 +15721,7 @@
       </p:sp>
       <p:sp>
         <p:nvSpPr>
-          <p:cNvPr id="46" name="S08-label254"/>
+          <p:cNvPr id="46" name="S08-label252"/>
           <p:cNvSpPr txBox="1"/>
           <p:nvPr/>
         </p:nvSpPr>
@@ -15799,7 +15760,7 @@
       </p:sp>
       <p:sp>
         <p:nvSpPr>
-          <p:cNvPr id="47" name="S08-label256"/>
+          <p:cNvPr id="47" name="S08-label254"/>
           <p:cNvSpPr txBox="1"/>
           <p:nvPr/>
         </p:nvSpPr>
@@ -15838,7 +15799,7 @@
       </p:sp>
       <p:sp>
         <p:nvSpPr>
-          <p:cNvPr id="48" name="S08-label258"/>
+          <p:cNvPr id="48" name="S08-label256"/>
           <p:cNvSpPr txBox="1"/>
           <p:nvPr/>
         </p:nvSpPr>
@@ -15877,7 +15838,7 @@
       </p:sp>
       <p:sp>
         <p:nvSpPr>
-          <p:cNvPr id="49" name="S08-card259"/>
+          <p:cNvPr id="49" name="S08-card257"/>
           <p:cNvSpPr/>
           <p:nvPr/>
         </p:nvSpPr>
@@ -15904,7 +15865,7 @@
       </p:sp>
       <p:sp>
         <p:nvSpPr>
-          <p:cNvPr id="50" name="S08-cardtext260"/>
+          <p:cNvPr id="50" name="S08-cardtext258"/>
           <p:cNvSpPr txBox="1"/>
           <p:nvPr/>
         </p:nvSpPr>
@@ -15966,7 +15927,7 @@
       </p:sp>
       <p:sp>
         <p:nvSpPr>
-          <p:cNvPr id="51" name="S08-card261"/>
+          <p:cNvPr id="51" name="S08-card259"/>
           <p:cNvSpPr/>
           <p:nvPr/>
         </p:nvSpPr>
@@ -15993,7 +15954,7 @@
       </p:sp>
       <p:sp>
         <p:nvSpPr>
-          <p:cNvPr id="52" name="S08-cardtext262"/>
+          <p:cNvPr id="52" name="S08-cardtext260"/>
           <p:cNvSpPr txBox="1"/>
           <p:nvPr/>
         </p:nvSpPr>
@@ -16149,7 +16110,7 @@
       </p:sp>
       <p:sp>
         <p:nvSpPr>
-          <p:cNvPr id="3" name="S09-text263"/>
+          <p:cNvPr id="3" name="S09-text261"/>
           <p:cNvSpPr txBox="1"/>
           <p:nvPr/>
         </p:nvSpPr>
@@ -16188,7 +16149,7 @@
       </p:sp>
       <p:sp>
         <p:nvSpPr>
-          <p:cNvPr id="4" name="S09-card264"/>
+          <p:cNvPr id="4" name="S09-card262"/>
           <p:cNvSpPr/>
           <p:nvPr/>
         </p:nvSpPr>
@@ -16215,7 +16176,7 @@
       </p:sp>
       <p:sp>
         <p:nvSpPr>
-          <p:cNvPr id="5" name="S09-cardtext265"/>
+          <p:cNvPr id="5" name="S09-cardtext263"/>
           <p:cNvSpPr txBox="1"/>
           <p:nvPr/>
         </p:nvSpPr>
@@ -16257,7 +16218,7 @@
       </p:sp>
       <p:sp>
         <p:nvSpPr>
-          <p:cNvPr id="6" name="S09-chip266"/>
+          <p:cNvPr id="6" name="S09-chip264"/>
           <p:cNvSpPr txBox="1"/>
           <p:nvPr/>
         </p:nvSpPr>
@@ -16304,7 +16265,7 @@
       </p:sp>
       <p:sp>
         <p:nvSpPr>
-          <p:cNvPr id="7" name="S09-text267"/>
+          <p:cNvPr id="7" name="S09-text265"/>
           <p:cNvSpPr txBox="1"/>
           <p:nvPr/>
         </p:nvSpPr>
@@ -16360,7 +16321,7 @@
       </p:sp>
       <p:sp>
         <p:nvSpPr>
-          <p:cNvPr id="8" name="S09-chip268"/>
+          <p:cNvPr id="8" name="S09-chip266"/>
           <p:cNvSpPr txBox="1"/>
           <p:nvPr/>
         </p:nvSpPr>
@@ -16407,7 +16368,7 @@
       </p:sp>
       <p:sp>
         <p:nvSpPr>
-          <p:cNvPr id="9" name="S09-text269"/>
+          <p:cNvPr id="9" name="S09-text267"/>
           <p:cNvSpPr txBox="1"/>
           <p:nvPr/>
         </p:nvSpPr>
@@ -16463,7 +16424,7 @@
       </p:sp>
       <p:sp>
         <p:nvSpPr>
-          <p:cNvPr id="10" name="S09-chip270"/>
+          <p:cNvPr id="10" name="S09-chip268"/>
           <p:cNvSpPr txBox="1"/>
           <p:nvPr/>
         </p:nvSpPr>
@@ -16510,7 +16471,7 @@
       </p:sp>
       <p:sp>
         <p:nvSpPr>
-          <p:cNvPr id="11" name="S09-text271"/>
+          <p:cNvPr id="11" name="S09-text269"/>
           <p:cNvSpPr txBox="1"/>
           <p:nvPr/>
         </p:nvSpPr>

--- a/dist/초6/수학/입체와측정/초6_수학_입체와측정_04_직육면체의겉넓이.pptx
+++ b/dist/초6/수학/입체와측정/초6_수학_입체와측정_04_직육면체의겉넓이.pptx
@@ -120,13 +120,13 @@
   <p:extLst>
     <p:ext uri="{521415D9-36F7-43E2-AB2F-B90AF26B5E84}">
       <p14:sectionLst xmlns:p14="http://schemas.microsoft.com/office/powerpoint/2010/main">
-        <p14:section name="도입" id="{494955e8-ab2b-0dc3-6f3a-a565df2ffdae}">
+        <p14:section name="도입" id="{c4e97d2b-0761-dabb-603c-56ee728e7e33}">
           <p14:sldIdLst>
             <p14:sldId id="256"/>
             <p14:sldId id="257"/>
           </p14:sldIdLst>
         </p14:section>
-        <p14:section name="개념" id="{cec6e53f-109d-fba9-5704-9c7d55803d23}">
+        <p14:section name="개념" id="{980ca73b-4c59-f4cf-a25b-d5af18c6005f}">
           <p14:sldIdLst>
             <p14:sldId id="258"/>
             <p14:sldId id="259"/>
@@ -134,32 +134,32 @@
             <p14:sldId id="263"/>
           </p14:sldIdLst>
         </p14:section>
-        <p14:section name="연습" id="{c90908e4-7c43-1ac6-ea28-6d95461f6730}">
+        <p14:section name="연습" id="{eae6cbf8-b99c-20c9-04e9-32602a33857f}">
           <p14:sldIdLst>
             <p14:sldId id="261"/>
             <p14:sldId id="262"/>
             <p14:sldId id="264"/>
           </p14:sldIdLst>
         </p14:section>
-        <p14:section name="개념" id="{f9ab2346-9710-75a1-0cbd-1386525d9ba4}">
+        <p14:section name="개념" id="{f7eea31d-9f5a-fe7b-9ba9-c5c03e50f483}">
           <p14:sldIdLst/>
         </p14:section>
-        <p14:section name="연습" id="{97038fc3-33e5-4851-08db-f4d10a05d2d6}">
+        <p14:section name="연습" id="{3f8c4946-9353-7fde-56cb-c9afb20e86f6}">
           <p14:sldIdLst/>
         </p14:section>
-        <p14:section name="확인" id="{7d53c0dd-290c-9827-96ef-41aa47cbe51f}">
+        <p14:section name="확인" id="{4eac2b0e-c80f-15d5-c6e7-b3694f48bec4}">
           <p14:sldIdLst>
             <p14:sldId id="265"/>
             <p14:sldId id="266"/>
             <p14:sldId id="267"/>
           </p14:sldIdLst>
         </p14:section>
-        <p14:section name="정리" id="{3ec8a091-c5fb-debf-20ba-56a86c8758ef}">
+        <p14:section name="정리" id="{00d4f15f-17bb-b7ce-68e9-cd8ac2dda715}">
           <p14:sldIdLst>
             <p14:sldId id="268"/>
           </p14:sldIdLst>
         </p14:section>
-        <p14:section name="보충" id="{83d4df49-4dce-758a-3c37-28d5358891d9}">
+        <p14:section name="보충" id="{b76336d3-068b-0f56-593c-e79b8071c208}">
           <p14:sldIdLst>
             <p14:sldId id="269"/>
           </p14:sldIdLst>
